--- a/figures/flattening.pptx
+++ b/figures/flattening.pptx
@@ -197,7 +197,7 @@
           <a:p>
             <a:fld id="{2992AD1B-ACFF-AC48-A573-E59A53D2D2BF}" type="datetimeFigureOut">
               <a:rPr lang="en-US" smtClean="0"/>
-              <a:t>1/8/26</a:t>
+              <a:t>2/25/26</a:t>
             </a:fld>
             <a:endParaRPr lang="en-US"/>
           </a:p>
@@ -698,7 +698,7 @@
           <a:p>
             <a:fld id="{E59A1132-0817-C444-A38D-920E5C58AEEF}" type="datetimeFigureOut">
               <a:rPr lang="en-US" smtClean="0"/>
-              <a:t>1/8/26</a:t>
+              <a:t>2/25/26</a:t>
             </a:fld>
             <a:endParaRPr lang="en-US"/>
           </a:p>
@@ -898,7 +898,7 @@
           <a:p>
             <a:fld id="{E59A1132-0817-C444-A38D-920E5C58AEEF}" type="datetimeFigureOut">
               <a:rPr lang="en-US" smtClean="0"/>
-              <a:t>1/8/26</a:t>
+              <a:t>2/25/26</a:t>
             </a:fld>
             <a:endParaRPr lang="en-US"/>
           </a:p>
@@ -1108,7 +1108,7 @@
           <a:p>
             <a:fld id="{E59A1132-0817-C444-A38D-920E5C58AEEF}" type="datetimeFigureOut">
               <a:rPr lang="en-US" smtClean="0"/>
-              <a:t>1/8/26</a:t>
+              <a:t>2/25/26</a:t>
             </a:fld>
             <a:endParaRPr lang="en-US"/>
           </a:p>
@@ -1308,7 +1308,7 @@
           <a:p>
             <a:fld id="{E59A1132-0817-C444-A38D-920E5C58AEEF}" type="datetimeFigureOut">
               <a:rPr lang="en-US" smtClean="0"/>
-              <a:t>1/8/26</a:t>
+              <a:t>2/25/26</a:t>
             </a:fld>
             <a:endParaRPr lang="en-US"/>
           </a:p>
@@ -1584,7 +1584,7 @@
           <a:p>
             <a:fld id="{E59A1132-0817-C444-A38D-920E5C58AEEF}" type="datetimeFigureOut">
               <a:rPr lang="en-US" smtClean="0"/>
-              <a:t>1/8/26</a:t>
+              <a:t>2/25/26</a:t>
             </a:fld>
             <a:endParaRPr lang="en-US"/>
           </a:p>
@@ -1852,7 +1852,7 @@
           <a:p>
             <a:fld id="{E59A1132-0817-C444-A38D-920E5C58AEEF}" type="datetimeFigureOut">
               <a:rPr lang="en-US" smtClean="0"/>
-              <a:t>1/8/26</a:t>
+              <a:t>2/25/26</a:t>
             </a:fld>
             <a:endParaRPr lang="en-US"/>
           </a:p>
@@ -2267,7 +2267,7 @@
           <a:p>
             <a:fld id="{E59A1132-0817-C444-A38D-920E5C58AEEF}" type="datetimeFigureOut">
               <a:rPr lang="en-US" smtClean="0"/>
-              <a:t>1/8/26</a:t>
+              <a:t>2/25/26</a:t>
             </a:fld>
             <a:endParaRPr lang="en-US"/>
           </a:p>
@@ -2409,7 +2409,7 @@
           <a:p>
             <a:fld id="{E59A1132-0817-C444-A38D-920E5C58AEEF}" type="datetimeFigureOut">
               <a:rPr lang="en-US" smtClean="0"/>
-              <a:t>1/8/26</a:t>
+              <a:t>2/25/26</a:t>
             </a:fld>
             <a:endParaRPr lang="en-US"/>
           </a:p>
@@ -2522,7 +2522,7 @@
           <a:p>
             <a:fld id="{E59A1132-0817-C444-A38D-920E5C58AEEF}" type="datetimeFigureOut">
               <a:rPr lang="en-US" smtClean="0"/>
-              <a:t>1/8/26</a:t>
+              <a:t>2/25/26</a:t>
             </a:fld>
             <a:endParaRPr lang="en-US"/>
           </a:p>
@@ -2835,7 +2835,7 @@
           <a:p>
             <a:fld id="{E59A1132-0817-C444-A38D-920E5C58AEEF}" type="datetimeFigureOut">
               <a:rPr lang="en-US" smtClean="0"/>
-              <a:t>1/8/26</a:t>
+              <a:t>2/25/26</a:t>
             </a:fld>
             <a:endParaRPr lang="en-US"/>
           </a:p>
@@ -3124,7 +3124,7 @@
           <a:p>
             <a:fld id="{E59A1132-0817-C444-A38D-920E5C58AEEF}" type="datetimeFigureOut">
               <a:rPr lang="en-US" smtClean="0"/>
-              <a:t>1/8/26</a:t>
+              <a:t>2/25/26</a:t>
             </a:fld>
             <a:endParaRPr lang="en-US"/>
           </a:p>
@@ -3367,7 +3367,7 @@
           <a:p>
             <a:fld id="{E59A1132-0817-C444-A38D-920E5C58AEEF}" type="datetimeFigureOut">
               <a:rPr lang="en-US" smtClean="0"/>
-              <a:t>1/8/26</a:t>
+              <a:t>2/25/26</a:t>
             </a:fld>
             <a:endParaRPr lang="en-US"/>
           </a:p>
@@ -3784,8 +3784,8 @@
           <a:chExt cx="0" cy="0"/>
         </a:xfrm>
       </p:grpSpPr>
-      <mc:AlternateContent xmlns:mc="http://schemas.openxmlformats.org/markup-compatibility/2006">
-        <mc:Choice xmlns:a14="http://schemas.microsoft.com/office/drawing/2010/main" Requires="a14">
+      <mc:AlternateContent xmlns:mc="http://schemas.openxmlformats.org/markup-compatibility/2006" xmlns:a14="http://schemas.microsoft.com/office/drawing/2010/main">
+        <mc:Choice Requires="a14">
           <p:sp>
             <p:nvSpPr>
               <p:cNvPr id="4" name="TextBox 3">
@@ -3800,7 +3800,7 @@
             </p:nvSpPr>
             <p:spPr>
               <a:xfrm>
-                <a:off x="2615707" y="2362694"/>
+                <a:off x="2913665" y="1792529"/>
                 <a:ext cx="2120709" cy="276999"/>
               </a:xfrm>
               <a:prstGeom prst="rect">
@@ -3964,7 +3964,7 @@
                       <m:sSub>
                         <m:sSubPr>
                           <m:ctrlPr>
-                            <a:rPr lang="en-US" b="1" i="1" smtClean="0">
+                            <a:rPr lang="en-US" i="1" smtClean="0">
                               <a:solidFill>
                                 <a:srgbClr val="D62728"/>
                               </a:solidFill>
@@ -3974,27 +3974,27 @@
                         </m:sSubPr>
                         <m:e>
                           <m:r>
-                            <a:rPr lang="en-US" b="1" i="1" smtClean="0">
+                            <a:rPr lang="en-US" b="0" i="1" smtClean="0">
                               <a:solidFill>
                                 <a:srgbClr val="D62728"/>
                               </a:solidFill>
                               <a:latin typeface="Cambria Math" panose="02040503050406030204" pitchFamily="18" charset="0"/>
                             </a:rPr>
-                            <m:t>𝒚</m:t>
+                            <m:t>𝑦</m:t>
                           </m:r>
                         </m:e>
                         <m:sub>
                           <m:r>
-                            <a:rPr lang="en-US" b="1" i="1" smtClean="0">
+                            <a:rPr lang="en-US" b="0" i="1" smtClean="0">
                               <a:solidFill>
                                 <a:srgbClr val="D62728"/>
                               </a:solidFill>
                               <a:latin typeface="Cambria Math" panose="02040503050406030204" pitchFamily="18" charset="0"/>
                             </a:rPr>
-                            <m:t>𝒊</m:t>
-                          </m:r>
-                          <m:r>
-                            <a:rPr lang="en-US" b="1" i="1" smtClean="0">
+                            <m:t>𝑖</m:t>
+                          </m:r>
+                          <m:r>
+                            <a:rPr lang="en-US" b="0" i="1" smtClean="0">
                               <a:solidFill>
                                 <a:srgbClr val="D62728"/>
                               </a:solidFill>
@@ -4007,7 +4007,7 @@
                     </m:oMath>
                   </m:oMathPara>
                 </a14:m>
-                <a:endParaRPr lang="en-US" b="1" dirty="0">
+                <a:endParaRPr lang="en-US" dirty="0">
                   <a:solidFill>
                     <a:srgbClr val="D62728"/>
                   </a:solidFill>
@@ -4016,7 +4016,7 @@
             </p:txBody>
           </p:sp>
         </mc:Choice>
-        <mc:Fallback>
+        <mc:Fallback xmlns="">
           <p:sp>
             <p:nvSpPr>
               <p:cNvPr id="4" name="TextBox 3">
@@ -4033,7 +4033,7 @@
             </p:nvSpPr>
             <p:spPr>
               <a:xfrm>
-                <a:off x="2615707" y="2362694"/>
+                <a:off x="2913665" y="1792529"/>
                 <a:ext cx="2120709" cy="276999"/>
               </a:xfrm>
               <a:prstGeom prst="rect">
@@ -4042,7 +4042,7 @@
               <a:blipFill>
                 <a:blip r:embed="rId3"/>
                 <a:stretch>
-                  <a:fillRect l="-2381" r="-2381" b="-40909"/>
+                  <a:fillRect l="-2381" r="-1786" b="-40909"/>
                 </a:stretch>
               </a:blipFill>
             </p:spPr>
@@ -4061,8 +4061,8 @@
           </p:sp>
         </mc:Fallback>
       </mc:AlternateContent>
-      <mc:AlternateContent xmlns:mc="http://schemas.openxmlformats.org/markup-compatibility/2006">
-        <mc:Choice xmlns:a14="http://schemas.microsoft.com/office/drawing/2010/main" Requires="a14">
+      <mc:AlternateContent xmlns:mc="http://schemas.openxmlformats.org/markup-compatibility/2006" xmlns:a14="http://schemas.microsoft.com/office/drawing/2010/main">
+        <mc:Choice Requires="a14">
           <p:sp>
             <p:nvSpPr>
               <p:cNvPr id="7" name="TextBox 6">
@@ -4077,7 +4077,7 @@
             </p:nvSpPr>
             <p:spPr>
               <a:xfrm>
-                <a:off x="2601847" y="3015372"/>
+                <a:off x="2899805" y="2445207"/>
                 <a:ext cx="2126416" cy="292003"/>
               </a:xfrm>
               <a:prstGeom prst="rect">
@@ -4265,7 +4265,7 @@
             </p:txBody>
           </p:sp>
         </mc:Choice>
-        <mc:Fallback>
+        <mc:Fallback xmlns="">
           <p:sp>
             <p:nvSpPr>
               <p:cNvPr id="7" name="TextBox 6">
@@ -4282,7 +4282,7 @@
             </p:nvSpPr>
             <p:spPr>
               <a:xfrm>
-                <a:off x="2601847" y="3015372"/>
+                <a:off x="2899805" y="2445207"/>
                 <a:ext cx="2126416" cy="292003"/>
               </a:xfrm>
               <a:prstGeom prst="rect">
@@ -4291,7 +4291,7 @@
               <a:blipFill>
                 <a:blip r:embed="rId4"/>
                 <a:stretch>
-                  <a:fillRect l="-592" b="-16667"/>
+                  <a:fillRect l="-1190" r="-595" b="-16667"/>
                 </a:stretch>
               </a:blipFill>
             </p:spPr>
@@ -4310,8 +4310,8 @@
           </p:sp>
         </mc:Fallback>
       </mc:AlternateContent>
-      <mc:AlternateContent xmlns:mc="http://schemas.openxmlformats.org/markup-compatibility/2006">
-        <mc:Choice xmlns:a14="http://schemas.microsoft.com/office/drawing/2010/main" Requires="a14">
+      <mc:AlternateContent xmlns:mc="http://schemas.openxmlformats.org/markup-compatibility/2006" xmlns:a14="http://schemas.microsoft.com/office/drawing/2010/main">
+        <mc:Choice Requires="a14">
           <p:sp>
             <p:nvSpPr>
               <p:cNvPr id="8" name="TextBox 7">
@@ -4326,8 +4326,8 @@
             </p:nvSpPr>
             <p:spPr>
               <a:xfrm>
-                <a:off x="2597449" y="3554492"/>
-                <a:ext cx="2180212" cy="292131"/>
+                <a:off x="2895407" y="2984327"/>
+                <a:ext cx="2262221" cy="338234"/>
               </a:xfrm>
               <a:prstGeom prst="rect">
                 <a:avLst/>
@@ -4390,12 +4390,31 @@
                           </m:r>
                         </m:sub>
                         <m:sup>
-                          <m:r>
-                            <a:rPr lang="en-US" b="0" i="1" smtClean="0">
-                              <a:latin typeface="Cambria Math" panose="02040503050406030204" pitchFamily="18" charset="0"/>
-                            </a:rPr>
-                            <m:t>𝑀</m:t>
-                          </m:r>
+                          <m:sSub>
+                            <m:sSubPr>
+                              <m:ctrlPr>
+                                <a:rPr lang="en-US" b="0" i="1" smtClean="0">
+                                  <a:latin typeface="Cambria Math" panose="02040503050406030204" pitchFamily="18" charset="0"/>
+                                </a:rPr>
+                              </m:ctrlPr>
+                            </m:sSubPr>
+                            <m:e>
+                              <m:r>
+                                <a:rPr lang="en-US" b="0" i="1" smtClean="0">
+                                  <a:latin typeface="Cambria Math" panose="02040503050406030204" pitchFamily="18" charset="0"/>
+                                </a:rPr>
+                                <m:t>𝑀</m:t>
+                              </m:r>
+                            </m:e>
+                            <m:sub>
+                              <m:r>
+                                <a:rPr lang="en-US" b="0" i="1" smtClean="0">
+                                  <a:latin typeface="Cambria Math" panose="02040503050406030204" pitchFamily="18" charset="0"/>
+                                </a:rPr>
+                                <m:t>𝑥</m:t>
+                              </m:r>
+                            </m:sub>
+                          </m:sSub>
                         </m:sup>
                       </m:sSubSup>
                       <m:r>
@@ -4447,12 +4466,31 @@
                           </m:r>
                         </m:sub>
                         <m:sup>
-                          <m:r>
-                            <a:rPr lang="en-US" b="0" i="1" smtClean="0">
-                              <a:latin typeface="Cambria Math" panose="02040503050406030204" pitchFamily="18" charset="0"/>
-                            </a:rPr>
-                            <m:t>𝑀</m:t>
-                          </m:r>
+                          <m:sSub>
+                            <m:sSubPr>
+                              <m:ctrlPr>
+                                <a:rPr lang="en-US" i="1">
+                                  <a:latin typeface="Cambria Math" panose="02040503050406030204" pitchFamily="18" charset="0"/>
+                                </a:rPr>
+                              </m:ctrlPr>
+                            </m:sSubPr>
+                            <m:e>
+                              <m:r>
+                                <a:rPr lang="en-US" i="1">
+                                  <a:latin typeface="Cambria Math" panose="02040503050406030204" pitchFamily="18" charset="0"/>
+                                </a:rPr>
+                                <m:t>𝑀</m:t>
+                              </m:r>
+                            </m:e>
+                            <m:sub>
+                              <m:r>
+                                <a:rPr lang="en-US" i="1">
+                                  <a:latin typeface="Cambria Math" panose="02040503050406030204" pitchFamily="18" charset="0"/>
+                                </a:rPr>
+                                <m:t>𝑥</m:t>
+                              </m:r>
+                            </m:sub>
+                          </m:sSub>
                         </m:sup>
                       </m:sSubSup>
                       <m:r>
@@ -4495,15 +4533,40 @@
                           </m:r>
                         </m:sub>
                         <m:sup>
-                          <m:r>
-                            <a:rPr lang="en-US" b="0" i="1" smtClean="0">
-                              <a:solidFill>
-                                <a:srgbClr val="1F77B4"/>
-                              </a:solidFill>
-                              <a:latin typeface="Cambria Math" panose="02040503050406030204" pitchFamily="18" charset="0"/>
-                            </a:rPr>
-                            <m:t>𝑀</m:t>
-                          </m:r>
+                          <m:sSub>
+                            <m:sSubPr>
+                              <m:ctrlPr>
+                                <a:rPr lang="en-US" b="0" i="1" smtClean="0">
+                                  <a:solidFill>
+                                    <a:srgbClr val="1F77B4"/>
+                                  </a:solidFill>
+                                  <a:latin typeface="Cambria Math" panose="02040503050406030204" pitchFamily="18" charset="0"/>
+                                </a:rPr>
+                              </m:ctrlPr>
+                            </m:sSubPr>
+                            <m:e>
+                              <m:r>
+                                <a:rPr lang="en-US" b="0" i="1" smtClean="0">
+                                  <a:solidFill>
+                                    <a:srgbClr val="1F77B4"/>
+                                  </a:solidFill>
+                                  <a:latin typeface="Cambria Math" panose="02040503050406030204" pitchFamily="18" charset="0"/>
+                                </a:rPr>
+                                <m:t>𝑀</m:t>
+                              </m:r>
+                            </m:e>
+                            <m:sub>
+                              <m:r>
+                                <a:rPr lang="en-US" b="0" i="1" smtClean="0">
+                                  <a:solidFill>
+                                    <a:srgbClr val="1F77B4"/>
+                                  </a:solidFill>
+                                  <a:latin typeface="Cambria Math" panose="02040503050406030204" pitchFamily="18" charset="0"/>
+                                </a:rPr>
+                                <m:t>𝑥</m:t>
+                              </m:r>
+                            </m:sub>
+                          </m:sSub>
                         </m:sup>
                       </m:sSubSup>
                     </m:oMath>
@@ -4514,7 +4577,7 @@
             </p:txBody>
           </p:sp>
         </mc:Choice>
-        <mc:Fallback>
+        <mc:Fallback xmlns="">
           <p:sp>
             <p:nvSpPr>
               <p:cNvPr id="8" name="TextBox 7">
@@ -4531,8 +4594,8 @@
             </p:nvSpPr>
             <p:spPr>
               <a:xfrm>
-                <a:off x="2597449" y="3554492"/>
-                <a:ext cx="2180212" cy="292131"/>
+                <a:off x="2895407" y="2984327"/>
+                <a:ext cx="2262221" cy="338234"/>
               </a:xfrm>
               <a:prstGeom prst="rect">
                 <a:avLst/>
@@ -4540,7 +4603,7 @@
               <a:blipFill>
                 <a:blip r:embed="rId5"/>
                 <a:stretch>
-                  <a:fillRect l="-1156" b="-20833"/>
+                  <a:fillRect l="-1117" t="-7407" b="-14815"/>
                 </a:stretch>
               </a:blipFill>
             </p:spPr>
@@ -4575,7 +4638,7 @@
             </p:nvSpPr>
             <p:spPr>
               <a:xfrm>
-                <a:off x="3583503" y="3249059"/>
+                <a:off x="3881461" y="2678894"/>
                 <a:ext cx="226024" cy="276999"/>
               </a:xfrm>
               <a:prstGeom prst="rect">
@@ -4627,7 +4690,7 @@
             </p:nvSpPr>
             <p:spPr>
               <a:xfrm>
-                <a:off x="3583503" y="3249059"/>
+                <a:off x="3881461" y="2678894"/>
                 <a:ext cx="226024" cy="276999"/>
               </a:xfrm>
               <a:prstGeom prst="rect">
@@ -4664,12 +4727,14 @@
               </a:ext>
             </a:extLst>
           </p:cNvPr>
-          <p:cNvCxnSpPr/>
+          <p:cNvCxnSpPr>
+            <a:cxnSpLocks/>
+          </p:cNvCxnSpPr>
           <p:nvPr/>
         </p:nvCxnSpPr>
         <p:spPr>
           <a:xfrm>
-            <a:off x="5120239" y="3285914"/>
+            <a:off x="5553881" y="3285914"/>
             <a:ext cx="649705" cy="0"/>
           </a:xfrm>
           <a:prstGeom prst="straightConnector1">
@@ -4708,7 +4773,7 @@
         </p:nvSpPr>
         <p:spPr>
           <a:xfrm>
-            <a:off x="4884617" y="2914755"/>
+            <a:off x="5318259" y="2914755"/>
             <a:ext cx="1120948" cy="369332"/>
           </a:xfrm>
           <a:prstGeom prst="rect">
@@ -4732,8 +4797,8 @@
           </a:p>
         </p:txBody>
       </p:sp>
-      <mc:AlternateContent xmlns:mc="http://schemas.openxmlformats.org/markup-compatibility/2006">
-        <mc:Choice xmlns:a14="http://schemas.microsoft.com/office/drawing/2010/main" Requires="a14">
+      <mc:AlternateContent xmlns:mc="http://schemas.openxmlformats.org/markup-compatibility/2006" xmlns:a14="http://schemas.microsoft.com/office/drawing/2010/main">
+        <mc:Choice Requires="a14">
           <p:sp>
             <p:nvSpPr>
               <p:cNvPr id="14" name="TextBox 13">
@@ -4748,8 +4813,8 @@
             </p:nvSpPr>
             <p:spPr>
               <a:xfrm>
-                <a:off x="6046858" y="3095717"/>
-                <a:ext cx="3420744" cy="292131"/>
+                <a:off x="6480500" y="3095717"/>
+                <a:ext cx="4952190" cy="338234"/>
               </a:xfrm>
               <a:prstGeom prst="rect">
                 <a:avLst/>
@@ -4912,7 +4977,7 @@
                       <m:sSub>
                         <m:sSubPr>
                           <m:ctrlPr>
-                            <a:rPr lang="en-US" b="1" i="1" smtClean="0">
+                            <a:rPr lang="en-US" i="1" smtClean="0">
                               <a:solidFill>
                                 <a:srgbClr val="D62728"/>
                               </a:solidFill>
@@ -4922,24 +4987,24 @@
                         </m:sSubPr>
                         <m:e>
                           <m:r>
-                            <a:rPr lang="en-US" b="1" i="1" smtClean="0">
+                            <a:rPr lang="en-US" b="0" i="1" smtClean="0">
                               <a:solidFill>
                                 <a:srgbClr val="D62728"/>
                               </a:solidFill>
                               <a:latin typeface="Cambria Math" panose="02040503050406030204" pitchFamily="18" charset="0"/>
                             </a:rPr>
-                            <m:t>𝒚</m:t>
+                            <m:t>𝑦</m:t>
                           </m:r>
                         </m:e>
                         <m:sub>
                           <m:r>
-                            <a:rPr lang="en-US" b="1" i="1" smtClean="0">
+                            <a:rPr lang="en-US" b="0" i="1" smtClean="0">
                               <a:solidFill>
                                 <a:srgbClr val="D62728"/>
                               </a:solidFill>
                               <a:latin typeface="Cambria Math" panose="02040503050406030204" pitchFamily="18" charset="0"/>
                             </a:rPr>
-                            <m:t>𝒊</m:t>
+                            <m:t>𝑖</m:t>
                           </m:r>
                         </m:sub>
                       </m:sSub>
@@ -5091,15 +5156,227 @@
                           </m:r>
                         </m:sub>
                         <m:sup>
-                          <m:r>
-                            <a:rPr lang="en-US" b="0" i="1" smtClean="0">
+                          <m:sSub>
+                            <m:sSubPr>
+                              <m:ctrlPr>
+                                <a:rPr lang="en-US" i="1">
+                                  <a:solidFill>
+                                    <a:srgbClr val="1F77B4"/>
+                                  </a:solidFill>
+                                  <a:latin typeface="Cambria Math" panose="02040503050406030204" pitchFamily="18" charset="0"/>
+                                </a:rPr>
+                              </m:ctrlPr>
+                            </m:sSubPr>
+                            <m:e>
+                              <m:r>
+                                <a:rPr lang="en-US" i="1">
+                                  <a:solidFill>
+                                    <a:srgbClr val="1F77B4"/>
+                                  </a:solidFill>
+                                  <a:latin typeface="Cambria Math" panose="02040503050406030204" pitchFamily="18" charset="0"/>
+                                </a:rPr>
+                                <m:t>𝑀</m:t>
+                              </m:r>
+                            </m:e>
+                            <m:sub>
+                              <m:r>
+                                <a:rPr lang="en-US" i="1">
+                                  <a:solidFill>
+                                    <a:srgbClr val="1F77B4"/>
+                                  </a:solidFill>
+                                  <a:latin typeface="Cambria Math" panose="02040503050406030204" pitchFamily="18" charset="0"/>
+                                </a:rPr>
+                                <m:t>𝑥</m:t>
+                              </m:r>
+                            </m:sub>
+                          </m:sSub>
+                        </m:sup>
+                      </m:sSubSup>
+                      <m:r>
+                        <a:rPr lang="en-US" b="0" i="1" smtClean="0">
+                          <a:solidFill>
+                            <a:schemeClr val="tx1"/>
+                          </a:solidFill>
+                          <a:latin typeface="Cambria Math" panose="02040503050406030204" pitchFamily="18" charset="0"/>
+                        </a:rPr>
+                        <m:t>,</m:t>
+                      </m:r>
+                      <m:sSubSup>
+                        <m:sSubSupPr>
+                          <m:ctrlPr>
+                            <a:rPr lang="en-US" i="1" smtClean="0">
                               <a:solidFill>
-                                <a:srgbClr val="0070C0"/>
+                                <a:srgbClr val="2CA02C"/>
                               </a:solidFill>
                               <a:latin typeface="Cambria Math" panose="02040503050406030204" pitchFamily="18" charset="0"/>
                             </a:rPr>
-                            <m:t>𝑀</m:t>
-                          </m:r>
+                          </m:ctrlPr>
+                        </m:sSubSupPr>
+                        <m:e>
+                          <m:r>
+                            <a:rPr lang="en-US" b="0" i="1" smtClean="0">
+                              <a:solidFill>
+                                <a:srgbClr val="2CA02C"/>
+                              </a:solidFill>
+                              <a:latin typeface="Cambria Math" panose="02040503050406030204" pitchFamily="18" charset="0"/>
+                            </a:rPr>
+                            <m:t>𝑢</m:t>
+                          </m:r>
+                        </m:e>
+                        <m:sub>
+                          <m:r>
+                            <a:rPr lang="en-US" i="1">
+                              <a:solidFill>
+                                <a:srgbClr val="2CA02C"/>
+                              </a:solidFill>
+                              <a:latin typeface="Cambria Math" panose="02040503050406030204" pitchFamily="18" charset="0"/>
+                            </a:rPr>
+                            <m:t>𝑖</m:t>
+                          </m:r>
+                        </m:sub>
+                        <m:sup>
+                          <m:r>
+                            <a:rPr lang="en-US" i="1">
+                              <a:solidFill>
+                                <a:srgbClr val="2CA02C"/>
+                              </a:solidFill>
+                              <a:latin typeface="Cambria Math" panose="02040503050406030204" pitchFamily="18" charset="0"/>
+                            </a:rPr>
+                            <m:t>1</m:t>
+                          </m:r>
+                        </m:sup>
+                      </m:sSubSup>
+                      <m:r>
+                        <a:rPr lang="en-US" i="1">
+                          <a:solidFill>
+                            <a:srgbClr val="2CA02C"/>
+                          </a:solidFill>
+                          <a:latin typeface="Cambria Math" panose="02040503050406030204" pitchFamily="18" charset="0"/>
+                        </a:rPr>
+                        <m:t>,</m:t>
+                      </m:r>
+                      <m:sSubSup>
+                        <m:sSubSupPr>
+                          <m:ctrlPr>
+                            <a:rPr lang="en-US" i="1">
+                              <a:solidFill>
+                                <a:srgbClr val="2CA02C"/>
+                              </a:solidFill>
+                              <a:latin typeface="Cambria Math" panose="02040503050406030204" pitchFamily="18" charset="0"/>
+                            </a:rPr>
+                          </m:ctrlPr>
+                        </m:sSubSupPr>
+                        <m:e>
+                          <m:r>
+                            <a:rPr lang="en-US" b="0" i="1" smtClean="0">
+                              <a:solidFill>
+                                <a:srgbClr val="2CA02C"/>
+                              </a:solidFill>
+                              <a:latin typeface="Cambria Math" panose="02040503050406030204" pitchFamily="18" charset="0"/>
+                            </a:rPr>
+                            <m:t>𝑢</m:t>
+                          </m:r>
+                        </m:e>
+                        <m:sub>
+                          <m:r>
+                            <a:rPr lang="en-US" i="1">
+                              <a:solidFill>
+                                <a:srgbClr val="2CA02C"/>
+                              </a:solidFill>
+                              <a:latin typeface="Cambria Math" panose="02040503050406030204" pitchFamily="18" charset="0"/>
+                            </a:rPr>
+                            <m:t>𝑖</m:t>
+                          </m:r>
+                        </m:sub>
+                        <m:sup>
+                          <m:r>
+                            <a:rPr lang="en-US" i="1">
+                              <a:solidFill>
+                                <a:srgbClr val="2CA02C"/>
+                              </a:solidFill>
+                              <a:latin typeface="Cambria Math" panose="02040503050406030204" pitchFamily="18" charset="0"/>
+                            </a:rPr>
+                            <m:t>2</m:t>
+                          </m:r>
+                        </m:sup>
+                      </m:sSubSup>
+                      <m:r>
+                        <a:rPr lang="en-US" i="1">
+                          <a:solidFill>
+                            <a:srgbClr val="2CA02C"/>
+                          </a:solidFill>
+                          <a:latin typeface="Cambria Math" panose="02040503050406030204" pitchFamily="18" charset="0"/>
+                        </a:rPr>
+                        <m:t>, …,</m:t>
+                      </m:r>
+                      <m:sSubSup>
+                        <m:sSubSupPr>
+                          <m:ctrlPr>
+                            <a:rPr lang="en-US" i="1">
+                              <a:solidFill>
+                                <a:srgbClr val="2CA02C"/>
+                              </a:solidFill>
+                              <a:latin typeface="Cambria Math" panose="02040503050406030204" pitchFamily="18" charset="0"/>
+                            </a:rPr>
+                          </m:ctrlPr>
+                        </m:sSubSupPr>
+                        <m:e>
+                          <m:r>
+                            <a:rPr lang="en-US" b="0" i="1" smtClean="0">
+                              <a:solidFill>
+                                <a:srgbClr val="2CA02C"/>
+                              </a:solidFill>
+                              <a:latin typeface="Cambria Math" panose="02040503050406030204" pitchFamily="18" charset="0"/>
+                            </a:rPr>
+                            <m:t>𝑢</m:t>
+                          </m:r>
+                        </m:e>
+                        <m:sub>
+                          <m:r>
+                            <a:rPr lang="en-US" i="1">
+                              <a:solidFill>
+                                <a:srgbClr val="2CA02C"/>
+                              </a:solidFill>
+                              <a:latin typeface="Cambria Math" panose="02040503050406030204" pitchFamily="18" charset="0"/>
+                            </a:rPr>
+                            <m:t>𝑖</m:t>
+                          </m:r>
+                        </m:sub>
+                        <m:sup>
+                          <m:sSub>
+                            <m:sSubPr>
+                              <m:ctrlPr>
+                                <a:rPr lang="en-US" i="1">
+                                  <a:solidFill>
+                                    <a:srgbClr val="2CA02C"/>
+                                  </a:solidFill>
+                                  <a:latin typeface="Cambria Math" panose="02040503050406030204" pitchFamily="18" charset="0"/>
+                                </a:rPr>
+                              </m:ctrlPr>
+                            </m:sSubPr>
+                            <m:e>
+                              <m:r>
+                                <a:rPr lang="en-US" i="1">
+                                  <a:solidFill>
+                                    <a:srgbClr val="2CA02C"/>
+                                  </a:solidFill>
+                                  <a:latin typeface="Cambria Math" panose="02040503050406030204" pitchFamily="18" charset="0"/>
+                                </a:rPr>
+                                <m:t>𝑀</m:t>
+                              </m:r>
+                            </m:e>
+                            <m:sub>
+                              <m:r>
+                                <a:rPr lang="en-US" i="1">
+                                  <a:solidFill>
+                                    <a:srgbClr val="2CA02C"/>
+                                  </a:solidFill>
+                                  <a:latin typeface="Cambria Math" panose="02040503050406030204" pitchFamily="18" charset="0"/>
+                                </a:rPr>
+                                <m:t>𝑢</m:t>
+                              </m:r>
+                            </m:sub>
+                          </m:sSub>
                         </m:sup>
                       </m:sSubSup>
                     </m:oMath>
@@ -5110,7 +5387,7 @@
             </p:txBody>
           </p:sp>
         </mc:Choice>
-        <mc:Fallback>
+        <mc:Fallback xmlns="">
           <p:sp>
             <p:nvSpPr>
               <p:cNvPr id="14" name="TextBox 13">
@@ -5127,8 +5404,8 @@
             </p:nvSpPr>
             <p:spPr>
               <a:xfrm>
-                <a:off x="6046858" y="3095717"/>
-                <a:ext cx="3420744" cy="292131"/>
+                <a:off x="6480500" y="3095717"/>
+                <a:ext cx="4952190" cy="338234"/>
               </a:xfrm>
               <a:prstGeom prst="rect">
                 <a:avLst/>
@@ -5136,7 +5413,7 @@
               <a:blipFill>
                 <a:blip r:embed="rId7"/>
                 <a:stretch>
-                  <a:fillRect l="-1481" b="-25000"/>
+                  <a:fillRect l="-767" t="-3571" b="-14286"/>
                 </a:stretch>
               </a:blipFill>
             </p:spPr>
@@ -5169,7 +5446,7 @@
         </p:nvSpPr>
         <p:spPr>
           <a:xfrm rot="16200000">
-            <a:off x="3560499" y="1241596"/>
+            <a:off x="3858457" y="671431"/>
             <a:ext cx="133612" cy="2058363"/>
           </a:xfrm>
           <a:prstGeom prst="rightBrace">
@@ -5213,7 +5490,7 @@
         </p:nvSpPr>
         <p:spPr>
           <a:xfrm>
-            <a:off x="2421547" y="2377121"/>
+            <a:off x="2719505" y="1806956"/>
             <a:ext cx="136050" cy="276999"/>
           </a:xfrm>
           <a:prstGeom prst="leftBrace">
@@ -5257,7 +5534,7 @@
         </p:nvSpPr>
         <p:spPr>
           <a:xfrm>
-            <a:off x="2420154" y="2712385"/>
+            <a:off x="2718112" y="2142220"/>
             <a:ext cx="136050" cy="1134238"/>
           </a:xfrm>
           <a:prstGeom prst="leftBrace">
@@ -5301,8 +5578,8 @@
         </p:nvSpPr>
         <p:spPr>
           <a:xfrm>
-            <a:off x="4409163" y="2700286"/>
-            <a:ext cx="336997" cy="1185286"/>
+            <a:off x="4707121" y="2130120"/>
+            <a:ext cx="450503" cy="2484059"/>
           </a:xfrm>
           <a:prstGeom prst="roundRect">
             <a:avLst/>
@@ -5335,8 +5612,8 @@
           </a:p>
         </p:txBody>
       </p:sp>
-      <mc:AlternateContent xmlns:mc="http://schemas.openxmlformats.org/markup-compatibility/2006">
-        <mc:Choice xmlns:a14="http://schemas.microsoft.com/office/drawing/2010/main" Requires="a14">
+      <mc:AlternateContent xmlns:mc="http://schemas.openxmlformats.org/markup-compatibility/2006" xmlns:a14="http://schemas.microsoft.com/office/drawing/2010/main">
+        <mc:Choice Requires="a14">
           <p:sp>
             <p:nvSpPr>
               <p:cNvPr id="20" name="TextBox 19">
@@ -5351,8 +5628,8 @@
             </p:nvSpPr>
             <p:spPr>
               <a:xfrm>
-                <a:off x="4516108" y="3687699"/>
-                <a:ext cx="4538213" cy="646331"/>
+                <a:off x="4949750" y="3791395"/>
+                <a:ext cx="4538213" cy="369332"/>
               </a:xfrm>
               <a:prstGeom prst="rect">
                 <a:avLst/>
@@ -5371,14 +5648,14 @@
                     <a:latin typeface="Times New Roman" panose="02020603050405020304" pitchFamily="18" charset="0"/>
                     <a:cs typeface="Times New Roman" panose="02020603050405020304" pitchFamily="18" charset="0"/>
                   </a:rPr>
-                  <a:t>Covariates of the last time point </a:t>
+                  <a:t>Covariates of the last target value </a:t>
                 </a:r>
                 <a14:m>
                   <m:oMath xmlns:m="http://schemas.openxmlformats.org/officeDocument/2006/math">
                     <m:sSub>
                       <m:sSubPr>
                         <m:ctrlPr>
-                          <a:rPr lang="en-US" b="1" i="1" smtClean="0">
+                          <a:rPr lang="en-US" i="1" smtClean="0">
                             <a:solidFill>
                               <a:srgbClr val="D62728"/>
                             </a:solidFill>
@@ -5389,53 +5666,40 @@
                       </m:sSubPr>
                       <m:e>
                         <m:r>
-                          <a:rPr lang="en-US" b="1" i="1" smtClean="0">
+                          <a:rPr lang="en-US" b="0" i="1" smtClean="0">
                             <a:solidFill>
                               <a:srgbClr val="D62728"/>
                             </a:solidFill>
                             <a:latin typeface="Cambria Math" panose="02040503050406030204" pitchFamily="18" charset="0"/>
                             <a:cs typeface="Times New Roman" panose="02020603050405020304" pitchFamily="18" charset="0"/>
                           </a:rPr>
-                          <m:t>𝒚</m:t>
+                          <m:t>𝑦</m:t>
                         </m:r>
                       </m:e>
                       <m:sub>
                         <m:r>
-                          <a:rPr lang="en-US" b="1" i="1" smtClean="0">
+                          <a:rPr lang="en-US" b="0" i="1" smtClean="0">
                             <a:solidFill>
                               <a:srgbClr val="D62728"/>
                             </a:solidFill>
                             <a:latin typeface="Cambria Math" panose="02040503050406030204" pitchFamily="18" charset="0"/>
                             <a:cs typeface="Times New Roman" panose="02020603050405020304" pitchFamily="18" charset="0"/>
                           </a:rPr>
-                          <m:t>𝒊</m:t>
+                          <m:t>𝑖</m:t>
                         </m:r>
                       </m:sub>
                     </m:sSub>
                   </m:oMath>
                 </a14:m>
-                <a:r>
-                  <a:rPr lang="en-US" dirty="0">
-                    <a:solidFill>
-                      <a:srgbClr val="D62728"/>
-                    </a:solidFill>
-                    <a:latin typeface="Times New Roman" panose="02020603050405020304" pitchFamily="18" charset="0"/>
-                    <a:cs typeface="Times New Roman" panose="02020603050405020304" pitchFamily="18" charset="0"/>
-                  </a:rPr>
-                  <a:t> </a:t>
-                </a:r>
-                <a:r>
-                  <a:rPr lang="en-US" dirty="0">
-                    <a:latin typeface="Times New Roman" panose="02020603050405020304" pitchFamily="18" charset="0"/>
-                    <a:cs typeface="Times New Roman" panose="02020603050405020304" pitchFamily="18" charset="0"/>
-                  </a:rPr>
-                  <a:t>of this window </a:t>
-                </a:r>
+                <a:endParaRPr lang="en-US" dirty="0">
+                  <a:latin typeface="Times New Roman" panose="02020603050405020304" pitchFamily="18" charset="0"/>
+                  <a:cs typeface="Times New Roman" panose="02020603050405020304" pitchFamily="18" charset="0"/>
+                </a:endParaRPr>
               </a:p>
             </p:txBody>
           </p:sp>
         </mc:Choice>
-        <mc:Fallback>
+        <mc:Fallback xmlns="">
           <p:sp>
             <p:nvSpPr>
               <p:cNvPr id="20" name="TextBox 19">
@@ -5452,8 +5716,8 @@
             </p:nvSpPr>
             <p:spPr>
               <a:xfrm>
-                <a:off x="4516108" y="3687699"/>
-                <a:ext cx="4538213" cy="646331"/>
+                <a:off x="4949750" y="3791395"/>
+                <a:ext cx="4538213" cy="369332"/>
               </a:xfrm>
               <a:prstGeom prst="rect">
                 <a:avLst/>
@@ -5461,7 +5725,7 @@
               <a:blipFill>
                 <a:blip r:embed="rId8"/>
                 <a:stretch>
-                  <a:fillRect t="-3846" b="-11538"/>
+                  <a:fillRect t="-6667" b="-23333"/>
                 </a:stretch>
               </a:blipFill>
             </p:spPr>
@@ -5494,8 +5758,8 @@
         </p:nvSpPr>
         <p:spPr>
           <a:xfrm>
-            <a:off x="1589588" y="2330954"/>
-            <a:ext cx="856901" cy="369332"/>
+            <a:off x="1363856" y="1756329"/>
+            <a:ext cx="1414746" cy="369332"/>
           </a:xfrm>
           <a:prstGeom prst="rect">
             <a:avLst/>
@@ -5513,7 +5777,7 @@
                 <a:latin typeface="Times New Roman" panose="02020603050405020304" pitchFamily="18" charset="0"/>
                 <a:cs typeface="Times New Roman" panose="02020603050405020304" pitchFamily="18" charset="0"/>
               </a:rPr>
-              <a:t>Targets</a:t>
+              <a:t>Target values</a:t>
             </a:r>
           </a:p>
         </p:txBody>
@@ -5532,7 +5796,7 @@
         </p:nvSpPr>
         <p:spPr>
           <a:xfrm>
-            <a:off x="1308658" y="3071860"/>
+            <a:off x="215245" y="3101903"/>
             <a:ext cx="1172116" cy="369332"/>
           </a:xfrm>
           <a:prstGeom prst="rect">
@@ -5570,8 +5834,8 @@
         </p:nvSpPr>
         <p:spPr>
           <a:xfrm rot="5400000">
-            <a:off x="8745013" y="2849963"/>
-            <a:ext cx="133611" cy="1209388"/>
+            <a:off x="9889150" y="2139468"/>
+            <a:ext cx="212337" cy="2709105"/>
           </a:xfrm>
           <a:prstGeom prst="rightBrace">
             <a:avLst/>
@@ -5616,13 +5880,12 @@
         </p:nvCxnSpPr>
         <p:spPr>
           <a:xfrm flipV="1">
-            <a:off x="4777661" y="3521463"/>
-            <a:ext cx="4034158" cy="179095"/>
+            <a:off x="5157624" y="3623195"/>
+            <a:ext cx="4837694" cy="168200"/>
           </a:xfrm>
-          <a:prstGeom prst="bentConnector4">
+          <a:prstGeom prst="bentConnector3">
             <a:avLst>
-              <a:gd name="adj1" fmla="val -781"/>
-              <a:gd name="adj2" fmla="val 983"/>
+              <a:gd name="adj1" fmla="val 100023"/>
             </a:avLst>
           </a:prstGeom>
           <a:ln>
@@ -5660,7 +5923,7 @@
             </p:nvSpPr>
             <p:spPr>
               <a:xfrm>
-                <a:off x="2294856" y="1879179"/>
+                <a:off x="2592814" y="1309014"/>
                 <a:ext cx="2664897" cy="369332"/>
               </a:xfrm>
               <a:prstGeom prst="rect">
@@ -5717,7 +5980,7 @@
             </p:nvSpPr>
             <p:spPr>
               <a:xfrm>
-                <a:off x="2294856" y="1879179"/>
+                <a:off x="2592814" y="1309014"/>
                 <a:ext cx="2664897" cy="369332"/>
               </a:xfrm>
               <a:prstGeom prst="rect">
@@ -5726,7 +5989,7 @@
               <a:blipFill>
                 <a:blip r:embed="rId9"/>
                 <a:stretch>
-                  <a:fillRect l="-1896" t="-6452" b="-19355"/>
+                  <a:fillRect l="-1905" t="-10345" b="-24138"/>
                 </a:stretch>
               </a:blipFill>
             </p:spPr>
@@ -5761,7 +6024,7 @@
         </p:nvCxnSpPr>
         <p:spPr>
           <a:xfrm>
-            <a:off x="8083506" y="2652183"/>
+            <a:off x="8517148" y="2652183"/>
             <a:ext cx="0" cy="437040"/>
           </a:xfrm>
           <a:prstGeom prst="straightConnector1">
@@ -5801,7 +6064,7 @@
         </p:nvSpPr>
         <p:spPr>
           <a:xfrm>
-            <a:off x="8115706" y="2669154"/>
+            <a:off x="8549348" y="2669154"/>
             <a:ext cx="1927826" cy="369332"/>
           </a:xfrm>
           <a:prstGeom prst="rect">
@@ -5841,7 +6104,7 @@
             </p:nvSpPr>
             <p:spPr>
               <a:xfrm>
-                <a:off x="7171974" y="2296749"/>
+                <a:off x="7605616" y="2296749"/>
                 <a:ext cx="1823063" cy="276999"/>
               </a:xfrm>
               <a:prstGeom prst="rect">
@@ -6056,7 +6319,7 @@
             </p:nvSpPr>
             <p:spPr>
               <a:xfrm>
-                <a:off x="7171974" y="2296749"/>
+                <a:off x="7605616" y="2296749"/>
                 <a:ext cx="1823063" cy="276999"/>
               </a:xfrm>
               <a:prstGeom prst="rect">
@@ -6065,7 +6328,7 @@
               <a:blipFill>
                 <a:blip r:embed="rId10"/>
                 <a:stretch>
-                  <a:fillRect l="-2759" r="-2069" b="-39130"/>
+                  <a:fillRect l="-3472" r="-2083" b="-39130"/>
                 </a:stretch>
               </a:blipFill>
             </p:spPr>
@@ -6084,8 +6347,8 @@
           </p:sp>
         </mc:Fallback>
       </mc:AlternateContent>
-      <mc:AlternateContent xmlns:mc="http://schemas.openxmlformats.org/markup-compatibility/2006" xmlns:a14="http://schemas.microsoft.com/office/drawing/2010/main">
-        <mc:Choice Requires="a14">
+      <mc:AlternateContent xmlns:mc="http://schemas.openxmlformats.org/markup-compatibility/2006">
+        <mc:Choice xmlns:a14="http://schemas.microsoft.com/office/drawing/2010/main" Requires="a14">
           <p:sp>
             <p:nvSpPr>
               <p:cNvPr id="78" name="TextBox 77">
@@ -6100,8 +6363,8 @@
             </p:nvSpPr>
             <p:spPr>
               <a:xfrm>
-                <a:off x="6096000" y="1573964"/>
-                <a:ext cx="4107882" cy="646331"/>
+                <a:off x="6203586" y="1803643"/>
+                <a:ext cx="4399703" cy="369332"/>
               </a:xfrm>
               <a:prstGeom prst="rect">
                 <a:avLst/>
@@ -6120,7 +6383,7 @@
                     <a:latin typeface="Times New Roman" panose="02020603050405020304" pitchFamily="18" charset="0"/>
                     <a:cs typeface="Times New Roman" panose="02020603050405020304" pitchFamily="18" charset="0"/>
                   </a:rPr>
-                  <a:t>The corresponding output (horizon) with length = </a:t>
+                  <a:t>The corresponding response with length = </a:t>
                 </a:r>
                 <a14:m>
                   <m:oMath xmlns:m="http://schemas.openxmlformats.org/officeDocument/2006/math">
@@ -6141,7 +6404,7 @@
             </p:txBody>
           </p:sp>
         </mc:Choice>
-        <mc:Fallback xmlns="">
+        <mc:Fallback>
           <p:sp>
             <p:nvSpPr>
               <p:cNvPr id="78" name="TextBox 77">
@@ -6158,8 +6421,8 @@
             </p:nvSpPr>
             <p:spPr>
               <a:xfrm>
-                <a:off x="6096000" y="1573964"/>
-                <a:ext cx="4107882" cy="646331"/>
+                <a:off x="6203586" y="1803643"/>
+                <a:ext cx="4399703" cy="369332"/>
               </a:xfrm>
               <a:prstGeom prst="rect">
                 <a:avLst/>
@@ -6167,7 +6430,7 @@
               <a:blipFill>
                 <a:blip r:embed="rId11"/>
                 <a:stretch>
-                  <a:fillRect t="-3846" r="-309" b="-13462"/>
+                  <a:fillRect t="-10345" b="-27586"/>
                 </a:stretch>
               </a:blipFill>
             </p:spPr>
@@ -6200,7 +6463,7 @@
         </p:nvSpPr>
         <p:spPr>
           <a:xfrm rot="16200000">
-            <a:off x="7980379" y="1415880"/>
+            <a:off x="8414021" y="1415880"/>
             <a:ext cx="120029" cy="1724900"/>
           </a:xfrm>
           <a:prstGeom prst="rightBrace">
@@ -6230,8 +6493,8 @@
           </a:p>
         </p:txBody>
       </p:sp>
-      <mc:AlternateContent xmlns:mc="http://schemas.openxmlformats.org/markup-compatibility/2006">
-        <mc:Choice xmlns:a14="http://schemas.microsoft.com/office/drawing/2010/main" Requires="a14">
+      <mc:AlternateContent xmlns:mc="http://schemas.openxmlformats.org/markup-compatibility/2006" xmlns:a14="http://schemas.microsoft.com/office/drawing/2010/main">
+        <mc:Choice Requires="a14">
           <p:sp>
             <p:nvSpPr>
               <p:cNvPr id="2" name="TextBox 1">
@@ -6246,7 +6509,7 @@
             </p:nvSpPr>
             <p:spPr>
               <a:xfrm>
-                <a:off x="2564442" y="2701085"/>
+                <a:off x="2862400" y="2130920"/>
                 <a:ext cx="2200666" cy="291426"/>
               </a:xfrm>
               <a:prstGeom prst="rect">
@@ -6434,7 +6697,7 @@
             </p:txBody>
           </p:sp>
         </mc:Choice>
-        <mc:Fallback>
+        <mc:Fallback xmlns="">
           <p:sp>
             <p:nvSpPr>
               <p:cNvPr id="2" name="TextBox 1">
@@ -6451,7 +6714,7 @@
             </p:nvSpPr>
             <p:spPr>
               <a:xfrm>
-                <a:off x="2564442" y="2701085"/>
+                <a:off x="2862400" y="2130920"/>
                 <a:ext cx="2200666" cy="291426"/>
               </a:xfrm>
               <a:prstGeom prst="rect">
@@ -6460,7 +6723,1599 @@
               <a:blipFill>
                 <a:blip r:embed="rId12"/>
                 <a:stretch>
-                  <a:fillRect b="-20833"/>
+                  <a:fillRect b="-17391"/>
+                </a:stretch>
+              </a:blipFill>
+            </p:spPr>
+            <p:txBody>
+              <a:bodyPr/>
+              <a:lstStyle/>
+              <a:p>
+                <a:r>
+                  <a:rPr lang="en-US">
+                    <a:noFill/>
+                  </a:rPr>
+                  <a:t> </a:t>
+                </a:r>
+              </a:p>
+            </p:txBody>
+          </p:sp>
+        </mc:Fallback>
+      </mc:AlternateContent>
+      <mc:AlternateContent xmlns:mc="http://schemas.openxmlformats.org/markup-compatibility/2006" xmlns:a14="http://schemas.microsoft.com/office/drawing/2010/main">
+        <mc:Choice Requires="a14">
+          <p:sp>
+            <p:nvSpPr>
+              <p:cNvPr id="26" name="TextBox 25">
+                <a:extLst>
+                  <a:ext uri="{FF2B5EF4-FFF2-40B4-BE49-F238E27FC236}">
+                    <a16:creationId xmlns:a16="http://schemas.microsoft.com/office/drawing/2014/main" id="{53D2BAA3-7312-D60A-F1EC-FE87E0BAD718}"/>
+                  </a:ext>
+                </a:extLst>
+              </p:cNvPr>
+              <p:cNvSpPr txBox="1"/>
+              <p:nvPr/>
+            </p:nvSpPr>
+            <p:spPr>
+              <a:xfrm>
+                <a:off x="2873259" y="3686345"/>
+                <a:ext cx="2152962" cy="292003"/>
+              </a:xfrm>
+              <a:prstGeom prst="rect">
+                <a:avLst/>
+              </a:prstGeom>
+              <a:noFill/>
+            </p:spPr>
+            <p:txBody>
+              <a:bodyPr wrap="none" lIns="0" tIns="0" rIns="0" bIns="0" rtlCol="0">
+                <a:spAutoFit/>
+              </a:bodyPr>
+              <a:lstStyle/>
+              <a:p>
+                <a:pPr/>
+                <a14:m>
+                  <m:oMathPara xmlns:m="http://schemas.openxmlformats.org/officeDocument/2006/math">
+                    <m:oMathParaPr>
+                      <m:jc m:val="centerGroup"/>
+                    </m:oMathParaPr>
+                    <m:oMath xmlns:m="http://schemas.openxmlformats.org/officeDocument/2006/math">
+                      <m:sSubSup>
+                        <m:sSubSupPr>
+                          <m:ctrlPr>
+                            <a:rPr lang="en-US" i="1" smtClean="0">
+                              <a:latin typeface="Cambria Math" panose="02040503050406030204" pitchFamily="18" charset="0"/>
+                            </a:rPr>
+                          </m:ctrlPr>
+                        </m:sSubSupPr>
+                        <m:e>
+                          <m:r>
+                            <a:rPr lang="en-US" b="0" i="1" smtClean="0">
+                              <a:latin typeface="Cambria Math" panose="02040503050406030204" pitchFamily="18" charset="0"/>
+                            </a:rPr>
+                            <m:t>𝑢</m:t>
+                          </m:r>
+                        </m:e>
+                        <m:sub>
+                          <m:r>
+                            <a:rPr lang="en-US" b="0" i="1" smtClean="0">
+                              <a:latin typeface="Cambria Math" panose="02040503050406030204" pitchFamily="18" charset="0"/>
+                            </a:rPr>
+                            <m:t>𝑖</m:t>
+                          </m:r>
+                          <m:r>
+                            <a:rPr lang="en-US" b="0" i="1" smtClean="0">
+                              <a:latin typeface="Cambria Math" panose="02040503050406030204" pitchFamily="18" charset="0"/>
+                            </a:rPr>
+                            <m:t>−</m:t>
+                          </m:r>
+                          <m:r>
+                            <a:rPr lang="en-US" b="0" i="1" smtClean="0">
+                              <a:latin typeface="Cambria Math" panose="02040503050406030204" pitchFamily="18" charset="0"/>
+                            </a:rPr>
+                            <m:t>𝑤</m:t>
+                          </m:r>
+                          <m:r>
+                            <a:rPr lang="en-US" b="0" i="1" smtClean="0">
+                              <a:latin typeface="Cambria Math" panose="02040503050406030204" pitchFamily="18" charset="0"/>
+                            </a:rPr>
+                            <m:t>+1</m:t>
+                          </m:r>
+                        </m:sub>
+                        <m:sup>
+                          <m:r>
+                            <a:rPr lang="en-US" b="0" i="1" smtClean="0">
+                              <a:latin typeface="Cambria Math" panose="02040503050406030204" pitchFamily="18" charset="0"/>
+                            </a:rPr>
+                            <m:t>2</m:t>
+                          </m:r>
+                        </m:sup>
+                      </m:sSubSup>
+                      <m:r>
+                        <a:rPr lang="en-US" b="0" i="1" smtClean="0">
+                          <a:latin typeface="Cambria Math" panose="02040503050406030204" pitchFamily="18" charset="0"/>
+                        </a:rPr>
+                        <m:t>,</m:t>
+                      </m:r>
+                      <m:sSubSup>
+                        <m:sSubSupPr>
+                          <m:ctrlPr>
+                            <a:rPr lang="en-US" i="1" smtClean="0">
+                              <a:latin typeface="Cambria Math" panose="02040503050406030204" pitchFamily="18" charset="0"/>
+                            </a:rPr>
+                          </m:ctrlPr>
+                        </m:sSubSupPr>
+                        <m:e>
+                          <m:r>
+                            <a:rPr lang="en-US" b="0" i="1" smtClean="0">
+                              <a:latin typeface="Cambria Math" panose="02040503050406030204" pitchFamily="18" charset="0"/>
+                            </a:rPr>
+                            <m:t>𝑢</m:t>
+                          </m:r>
+                        </m:e>
+                        <m:sub>
+                          <m:r>
+                            <a:rPr lang="en-US" b="0" i="1" smtClean="0">
+                              <a:latin typeface="Cambria Math" panose="02040503050406030204" pitchFamily="18" charset="0"/>
+                            </a:rPr>
+                            <m:t>𝑖</m:t>
+                          </m:r>
+                          <m:r>
+                            <a:rPr lang="en-US" b="0" i="1" smtClean="0">
+                              <a:latin typeface="Cambria Math" panose="02040503050406030204" pitchFamily="18" charset="0"/>
+                            </a:rPr>
+                            <m:t>−</m:t>
+                          </m:r>
+                          <m:r>
+                            <a:rPr lang="en-US" b="0" i="1" smtClean="0">
+                              <a:latin typeface="Cambria Math" panose="02040503050406030204" pitchFamily="18" charset="0"/>
+                            </a:rPr>
+                            <m:t>𝑤</m:t>
+                          </m:r>
+                          <m:r>
+                            <a:rPr lang="en-US" b="0" i="1" smtClean="0">
+                              <a:latin typeface="Cambria Math" panose="02040503050406030204" pitchFamily="18" charset="0"/>
+                            </a:rPr>
+                            <m:t>+2</m:t>
+                          </m:r>
+                        </m:sub>
+                        <m:sup>
+                          <m:r>
+                            <a:rPr lang="en-US" b="0" i="1" smtClean="0">
+                              <a:latin typeface="Cambria Math" panose="02040503050406030204" pitchFamily="18" charset="0"/>
+                            </a:rPr>
+                            <m:t>2</m:t>
+                          </m:r>
+                        </m:sup>
+                      </m:sSubSup>
+                      <m:r>
+                        <a:rPr lang="en-US" b="0" i="1" smtClean="0">
+                          <a:latin typeface="Cambria Math" panose="02040503050406030204" pitchFamily="18" charset="0"/>
+                        </a:rPr>
+                        <m:t>, …,</m:t>
+                      </m:r>
+                      <m:sSubSup>
+                        <m:sSubSupPr>
+                          <m:ctrlPr>
+                            <a:rPr lang="en-US" i="1" smtClean="0">
+                              <a:solidFill>
+                                <a:srgbClr val="2CA02C"/>
+                              </a:solidFill>
+                              <a:latin typeface="Cambria Math" panose="02040503050406030204" pitchFamily="18" charset="0"/>
+                            </a:rPr>
+                          </m:ctrlPr>
+                        </m:sSubSupPr>
+                        <m:e>
+                          <m:r>
+                            <a:rPr lang="en-US" b="0" i="1" smtClean="0">
+                              <a:solidFill>
+                                <a:srgbClr val="2CA02C"/>
+                              </a:solidFill>
+                              <a:latin typeface="Cambria Math" panose="02040503050406030204" pitchFamily="18" charset="0"/>
+                            </a:rPr>
+                            <m:t>𝑢</m:t>
+                          </m:r>
+                        </m:e>
+                        <m:sub>
+                          <m:r>
+                            <a:rPr lang="en-US" b="0" i="1" smtClean="0">
+                              <a:solidFill>
+                                <a:srgbClr val="2CA02C"/>
+                              </a:solidFill>
+                              <a:latin typeface="Cambria Math" panose="02040503050406030204" pitchFamily="18" charset="0"/>
+                            </a:rPr>
+                            <m:t>𝑖</m:t>
+                          </m:r>
+                        </m:sub>
+                        <m:sup>
+                          <m:r>
+                            <a:rPr lang="en-US" b="0" i="1" smtClean="0">
+                              <a:solidFill>
+                                <a:srgbClr val="2CA02C"/>
+                              </a:solidFill>
+                              <a:latin typeface="Cambria Math" panose="02040503050406030204" pitchFamily="18" charset="0"/>
+                            </a:rPr>
+                            <m:t>2</m:t>
+                          </m:r>
+                        </m:sup>
+                      </m:sSubSup>
+                    </m:oMath>
+                  </m:oMathPara>
+                </a14:m>
+                <a:endParaRPr lang="en-US" dirty="0"/>
+              </a:p>
+            </p:txBody>
+          </p:sp>
+        </mc:Choice>
+        <mc:Fallback xmlns="">
+          <p:sp>
+            <p:nvSpPr>
+              <p:cNvPr id="26" name="TextBox 25">
+                <a:extLst>
+                  <a:ext uri="{FF2B5EF4-FFF2-40B4-BE49-F238E27FC236}">
+                    <a16:creationId xmlns:a16="http://schemas.microsoft.com/office/drawing/2014/main" id="{53D2BAA3-7312-D60A-F1EC-FE87E0BAD718}"/>
+                  </a:ext>
+                </a:extLst>
+              </p:cNvPr>
+              <p:cNvSpPr txBox="1">
+                <a:spLocks noRot="1" noChangeAspect="1" noMove="1" noResize="1" noEditPoints="1" noAdjustHandles="1" noChangeArrowheads="1" noChangeShapeType="1" noTextEdit="1"/>
+              </p:cNvSpPr>
+              <p:nvPr/>
+            </p:nvSpPr>
+            <p:spPr>
+              <a:xfrm>
+                <a:off x="2873259" y="3686345"/>
+                <a:ext cx="2152962" cy="292003"/>
+              </a:xfrm>
+              <a:prstGeom prst="rect">
+                <a:avLst/>
+              </a:prstGeom>
+              <a:blipFill>
+                <a:blip r:embed="rId13"/>
+                <a:stretch>
+                  <a:fillRect l="-1176" r="-588" b="-16667"/>
+                </a:stretch>
+              </a:blipFill>
+            </p:spPr>
+            <p:txBody>
+              <a:bodyPr/>
+              <a:lstStyle/>
+              <a:p>
+                <a:r>
+                  <a:rPr lang="en-US">
+                    <a:noFill/>
+                  </a:rPr>
+                  <a:t> </a:t>
+                </a:r>
+              </a:p>
+            </p:txBody>
+          </p:sp>
+        </mc:Fallback>
+      </mc:AlternateContent>
+      <mc:AlternateContent xmlns:mc="http://schemas.openxmlformats.org/markup-compatibility/2006" xmlns:a14="http://schemas.microsoft.com/office/drawing/2010/main">
+        <mc:Choice Requires="a14">
+          <p:sp>
+            <p:nvSpPr>
+              <p:cNvPr id="27" name="TextBox 26">
+                <a:extLst>
+                  <a:ext uri="{FF2B5EF4-FFF2-40B4-BE49-F238E27FC236}">
+                    <a16:creationId xmlns:a16="http://schemas.microsoft.com/office/drawing/2014/main" id="{05602FD6-FDE0-AC9C-E9FE-2AA67A1A914D}"/>
+                  </a:ext>
+                </a:extLst>
+              </p:cNvPr>
+              <p:cNvSpPr txBox="1"/>
+              <p:nvPr/>
+            </p:nvSpPr>
+            <p:spPr>
+              <a:xfrm>
+                <a:off x="2850201" y="4240314"/>
+                <a:ext cx="2352632" cy="349455"/>
+              </a:xfrm>
+              <a:prstGeom prst="rect">
+                <a:avLst/>
+              </a:prstGeom>
+              <a:noFill/>
+            </p:spPr>
+            <p:txBody>
+              <a:bodyPr wrap="none" lIns="0" tIns="0" rIns="0" bIns="0" rtlCol="0">
+                <a:spAutoFit/>
+              </a:bodyPr>
+              <a:lstStyle/>
+              <a:p>
+                <a:pPr/>
+                <a14:m>
+                  <m:oMathPara xmlns:m="http://schemas.openxmlformats.org/officeDocument/2006/math">
+                    <m:oMathParaPr>
+                      <m:jc m:val="centerGroup"/>
+                    </m:oMathParaPr>
+                    <m:oMath xmlns:m="http://schemas.openxmlformats.org/officeDocument/2006/math">
+                      <m:sSubSup>
+                        <m:sSubSupPr>
+                          <m:ctrlPr>
+                            <a:rPr lang="en-US" i="1" smtClean="0">
+                              <a:latin typeface="Cambria Math" panose="02040503050406030204" pitchFamily="18" charset="0"/>
+                            </a:rPr>
+                          </m:ctrlPr>
+                        </m:sSubSupPr>
+                        <m:e>
+                          <m:r>
+                            <a:rPr lang="en-US" b="0" i="1" smtClean="0">
+                              <a:latin typeface="Cambria Math" panose="02040503050406030204" pitchFamily="18" charset="0"/>
+                            </a:rPr>
+                            <m:t>𝑢</m:t>
+                          </m:r>
+                        </m:e>
+                        <m:sub>
+                          <m:r>
+                            <a:rPr lang="en-US" b="0" i="1" smtClean="0">
+                              <a:latin typeface="Cambria Math" panose="02040503050406030204" pitchFamily="18" charset="0"/>
+                            </a:rPr>
+                            <m:t>𝑖</m:t>
+                          </m:r>
+                          <m:r>
+                            <a:rPr lang="en-US" b="0" i="1" smtClean="0">
+                              <a:latin typeface="Cambria Math" panose="02040503050406030204" pitchFamily="18" charset="0"/>
+                            </a:rPr>
+                            <m:t>−</m:t>
+                          </m:r>
+                          <m:r>
+                            <a:rPr lang="en-US" b="0" i="1" smtClean="0">
+                              <a:latin typeface="Cambria Math" panose="02040503050406030204" pitchFamily="18" charset="0"/>
+                            </a:rPr>
+                            <m:t>𝑤</m:t>
+                          </m:r>
+                          <m:r>
+                            <a:rPr lang="en-US" b="0" i="1" smtClean="0">
+                              <a:latin typeface="Cambria Math" panose="02040503050406030204" pitchFamily="18" charset="0"/>
+                            </a:rPr>
+                            <m:t>+1</m:t>
+                          </m:r>
+                        </m:sub>
+                        <m:sup>
+                          <m:sSub>
+                            <m:sSubPr>
+                              <m:ctrlPr>
+                                <a:rPr lang="en-US" b="0" i="1" smtClean="0">
+                                  <a:latin typeface="Cambria Math" panose="02040503050406030204" pitchFamily="18" charset="0"/>
+                                </a:rPr>
+                              </m:ctrlPr>
+                            </m:sSubPr>
+                            <m:e>
+                              <m:r>
+                                <a:rPr lang="en-US" b="0" i="1" smtClean="0">
+                                  <a:latin typeface="Cambria Math" panose="02040503050406030204" pitchFamily="18" charset="0"/>
+                                </a:rPr>
+                                <m:t>𝑀</m:t>
+                              </m:r>
+                            </m:e>
+                            <m:sub>
+                              <m:r>
+                                <a:rPr lang="en-US" b="0" i="1" smtClean="0">
+                                  <a:latin typeface="Cambria Math" panose="02040503050406030204" pitchFamily="18" charset="0"/>
+                                </a:rPr>
+                                <m:t>𝑢</m:t>
+                              </m:r>
+                            </m:sub>
+                          </m:sSub>
+                        </m:sup>
+                      </m:sSubSup>
+                      <m:r>
+                        <a:rPr lang="en-US" b="0" i="1" smtClean="0">
+                          <a:latin typeface="Cambria Math" panose="02040503050406030204" pitchFamily="18" charset="0"/>
+                        </a:rPr>
+                        <m:t>,</m:t>
+                      </m:r>
+                      <m:sSubSup>
+                        <m:sSubSupPr>
+                          <m:ctrlPr>
+                            <a:rPr lang="en-US" i="1" smtClean="0">
+                              <a:latin typeface="Cambria Math" panose="02040503050406030204" pitchFamily="18" charset="0"/>
+                            </a:rPr>
+                          </m:ctrlPr>
+                        </m:sSubSupPr>
+                        <m:e>
+                          <m:r>
+                            <a:rPr lang="en-US" b="0" i="1" smtClean="0">
+                              <a:latin typeface="Cambria Math" panose="02040503050406030204" pitchFamily="18" charset="0"/>
+                            </a:rPr>
+                            <m:t>𝑢</m:t>
+                          </m:r>
+                        </m:e>
+                        <m:sub>
+                          <m:r>
+                            <a:rPr lang="en-US" b="0" i="1" smtClean="0">
+                              <a:latin typeface="Cambria Math" panose="02040503050406030204" pitchFamily="18" charset="0"/>
+                            </a:rPr>
+                            <m:t>𝑖</m:t>
+                          </m:r>
+                          <m:r>
+                            <a:rPr lang="en-US" b="0" i="1" smtClean="0">
+                              <a:latin typeface="Cambria Math" panose="02040503050406030204" pitchFamily="18" charset="0"/>
+                            </a:rPr>
+                            <m:t>−</m:t>
+                          </m:r>
+                          <m:r>
+                            <a:rPr lang="en-US" b="0" i="1" smtClean="0">
+                              <a:latin typeface="Cambria Math" panose="02040503050406030204" pitchFamily="18" charset="0"/>
+                            </a:rPr>
+                            <m:t>𝑤</m:t>
+                          </m:r>
+                          <m:r>
+                            <a:rPr lang="en-US" b="0" i="1" smtClean="0">
+                              <a:latin typeface="Cambria Math" panose="02040503050406030204" pitchFamily="18" charset="0"/>
+                            </a:rPr>
+                            <m:t>+2</m:t>
+                          </m:r>
+                        </m:sub>
+                        <m:sup>
+                          <m:sSub>
+                            <m:sSubPr>
+                              <m:ctrlPr>
+                                <a:rPr lang="en-US" i="1">
+                                  <a:latin typeface="Cambria Math" panose="02040503050406030204" pitchFamily="18" charset="0"/>
+                                </a:rPr>
+                              </m:ctrlPr>
+                            </m:sSubPr>
+                            <m:e>
+                              <m:r>
+                                <a:rPr lang="en-US" i="1">
+                                  <a:latin typeface="Cambria Math" panose="02040503050406030204" pitchFamily="18" charset="0"/>
+                                </a:rPr>
+                                <m:t>𝑀</m:t>
+                              </m:r>
+                            </m:e>
+                            <m:sub>
+                              <m:r>
+                                <a:rPr lang="en-US" b="0" i="1" smtClean="0">
+                                  <a:latin typeface="Cambria Math" panose="02040503050406030204" pitchFamily="18" charset="0"/>
+                                </a:rPr>
+                                <m:t>𝑢</m:t>
+                              </m:r>
+                            </m:sub>
+                          </m:sSub>
+                        </m:sup>
+                      </m:sSubSup>
+                      <m:r>
+                        <a:rPr lang="en-US" b="0" i="1" smtClean="0">
+                          <a:latin typeface="Cambria Math" panose="02040503050406030204" pitchFamily="18" charset="0"/>
+                        </a:rPr>
+                        <m:t>, …,</m:t>
+                      </m:r>
+                      <m:sSubSup>
+                        <m:sSubSupPr>
+                          <m:ctrlPr>
+                            <a:rPr lang="en-US" i="1" smtClean="0">
+                              <a:solidFill>
+                                <a:srgbClr val="2CA02C"/>
+                              </a:solidFill>
+                              <a:latin typeface="Cambria Math" panose="02040503050406030204" pitchFamily="18" charset="0"/>
+                            </a:rPr>
+                          </m:ctrlPr>
+                        </m:sSubSupPr>
+                        <m:e>
+                          <m:r>
+                            <a:rPr lang="en-US" b="0" i="1" smtClean="0">
+                              <a:solidFill>
+                                <a:srgbClr val="2CA02C"/>
+                              </a:solidFill>
+                              <a:latin typeface="Cambria Math" panose="02040503050406030204" pitchFamily="18" charset="0"/>
+                            </a:rPr>
+                            <m:t>𝑢</m:t>
+                          </m:r>
+                        </m:e>
+                        <m:sub>
+                          <m:r>
+                            <a:rPr lang="en-US" b="0" i="1" smtClean="0">
+                              <a:solidFill>
+                                <a:srgbClr val="2CA02C"/>
+                              </a:solidFill>
+                              <a:latin typeface="Cambria Math" panose="02040503050406030204" pitchFamily="18" charset="0"/>
+                            </a:rPr>
+                            <m:t>𝑖</m:t>
+                          </m:r>
+                        </m:sub>
+                        <m:sup>
+                          <m:sSub>
+                            <m:sSubPr>
+                              <m:ctrlPr>
+                                <a:rPr lang="en-US" b="0" i="1" smtClean="0">
+                                  <a:solidFill>
+                                    <a:srgbClr val="2CA02C"/>
+                                  </a:solidFill>
+                                  <a:latin typeface="Cambria Math" panose="02040503050406030204" pitchFamily="18" charset="0"/>
+                                </a:rPr>
+                              </m:ctrlPr>
+                            </m:sSubPr>
+                            <m:e>
+                              <m:r>
+                                <a:rPr lang="en-US" b="0" i="1" smtClean="0">
+                                  <a:solidFill>
+                                    <a:srgbClr val="2CA02C"/>
+                                  </a:solidFill>
+                                  <a:latin typeface="Cambria Math" panose="02040503050406030204" pitchFamily="18" charset="0"/>
+                                </a:rPr>
+                                <m:t>𝑀</m:t>
+                              </m:r>
+                            </m:e>
+                            <m:sub>
+                              <m:r>
+                                <a:rPr lang="en-US" b="0" i="1" smtClean="0">
+                                  <a:solidFill>
+                                    <a:srgbClr val="2CA02C"/>
+                                  </a:solidFill>
+                                  <a:latin typeface="Cambria Math" panose="02040503050406030204" pitchFamily="18" charset="0"/>
+                                </a:rPr>
+                                <m:t>𝑢</m:t>
+                              </m:r>
+                            </m:sub>
+                          </m:sSub>
+                        </m:sup>
+                      </m:sSubSup>
+                    </m:oMath>
+                  </m:oMathPara>
+                </a14:m>
+                <a:endParaRPr lang="en-US" dirty="0"/>
+              </a:p>
+            </p:txBody>
+          </p:sp>
+        </mc:Choice>
+        <mc:Fallback xmlns="">
+          <p:sp>
+            <p:nvSpPr>
+              <p:cNvPr id="27" name="TextBox 26">
+                <a:extLst>
+                  <a:ext uri="{FF2B5EF4-FFF2-40B4-BE49-F238E27FC236}">
+                    <a16:creationId xmlns:a16="http://schemas.microsoft.com/office/drawing/2014/main" id="{05602FD6-FDE0-AC9C-E9FE-2AA67A1A914D}"/>
+                  </a:ext>
+                </a:extLst>
+              </p:cNvPr>
+              <p:cNvSpPr txBox="1">
+                <a:spLocks noRot="1" noChangeAspect="1" noMove="1" noResize="1" noEditPoints="1" noAdjustHandles="1" noChangeArrowheads="1" noChangeShapeType="1" noTextEdit="1"/>
+              </p:cNvSpPr>
+              <p:nvPr/>
+            </p:nvSpPr>
+            <p:spPr>
+              <a:xfrm>
+                <a:off x="2850201" y="4240314"/>
+                <a:ext cx="2352632" cy="349455"/>
+              </a:xfrm>
+              <a:prstGeom prst="rect">
+                <a:avLst/>
+              </a:prstGeom>
+              <a:blipFill>
+                <a:blip r:embed="rId14"/>
+                <a:stretch>
+                  <a:fillRect t="-3571" b="-10714"/>
+                </a:stretch>
+              </a:blipFill>
+            </p:spPr>
+            <p:txBody>
+              <a:bodyPr/>
+              <a:lstStyle/>
+              <a:p>
+                <a:r>
+                  <a:rPr lang="en-US">
+                    <a:noFill/>
+                  </a:rPr>
+                  <a:t> </a:t>
+                </a:r>
+              </a:p>
+            </p:txBody>
+          </p:sp>
+        </mc:Fallback>
+      </mc:AlternateContent>
+      <mc:AlternateContent xmlns:mc="http://schemas.openxmlformats.org/markup-compatibility/2006" xmlns:a14="http://schemas.microsoft.com/office/drawing/2010/main">
+        <mc:Choice Requires="a14">
+          <p:sp>
+            <p:nvSpPr>
+              <p:cNvPr id="28" name="TextBox 27">
+                <a:extLst>
+                  <a:ext uri="{FF2B5EF4-FFF2-40B4-BE49-F238E27FC236}">
+                    <a16:creationId xmlns:a16="http://schemas.microsoft.com/office/drawing/2014/main" id="{EF40D1AD-A756-E2FD-13D3-8202AD948724}"/>
+                  </a:ext>
+                </a:extLst>
+              </p:cNvPr>
+              <p:cNvSpPr txBox="1"/>
+              <p:nvPr/>
+            </p:nvSpPr>
+            <p:spPr>
+              <a:xfrm>
+                <a:off x="3881461" y="3920135"/>
+                <a:ext cx="226024" cy="276999"/>
+              </a:xfrm>
+              <a:prstGeom prst="rect">
+                <a:avLst/>
+              </a:prstGeom>
+              <a:noFill/>
+            </p:spPr>
+            <p:txBody>
+              <a:bodyPr wrap="none" lIns="0" tIns="0" rIns="0" bIns="0" rtlCol="0">
+                <a:spAutoFit/>
+              </a:bodyPr>
+              <a:lstStyle/>
+              <a:p>
+                <a:pPr/>
+                <a14:m>
+                  <m:oMathPara xmlns:m="http://schemas.openxmlformats.org/officeDocument/2006/math">
+                    <m:oMathParaPr>
+                      <m:jc m:val="centerGroup"/>
+                    </m:oMathParaPr>
+                    <m:oMath xmlns:m="http://schemas.openxmlformats.org/officeDocument/2006/math">
+                      <m:r>
+                        <a:rPr lang="en-US" b="0" i="1" smtClean="0">
+                          <a:latin typeface="Cambria Math" panose="02040503050406030204" pitchFamily="18" charset="0"/>
+                        </a:rPr>
+                        <m:t>…</m:t>
+                      </m:r>
+                    </m:oMath>
+                  </m:oMathPara>
+                </a14:m>
+                <a:endParaRPr lang="en-US" dirty="0"/>
+              </a:p>
+            </p:txBody>
+          </p:sp>
+        </mc:Choice>
+        <mc:Fallback xmlns="">
+          <p:sp>
+            <p:nvSpPr>
+              <p:cNvPr id="28" name="TextBox 27">
+                <a:extLst>
+                  <a:ext uri="{FF2B5EF4-FFF2-40B4-BE49-F238E27FC236}">
+                    <a16:creationId xmlns:a16="http://schemas.microsoft.com/office/drawing/2014/main" id="{EF40D1AD-A756-E2FD-13D3-8202AD948724}"/>
+                  </a:ext>
+                </a:extLst>
+              </p:cNvPr>
+              <p:cNvSpPr txBox="1">
+                <a:spLocks noRot="1" noChangeAspect="1" noMove="1" noResize="1" noEditPoints="1" noAdjustHandles="1" noChangeArrowheads="1" noChangeShapeType="1" noTextEdit="1"/>
+              </p:cNvSpPr>
+              <p:nvPr/>
+            </p:nvSpPr>
+            <p:spPr>
+              <a:xfrm>
+                <a:off x="3881461" y="3920135"/>
+                <a:ext cx="226024" cy="276999"/>
+              </a:xfrm>
+              <a:prstGeom prst="rect">
+                <a:avLst/>
+              </a:prstGeom>
+              <a:blipFill>
+                <a:blip r:embed="rId6"/>
+                <a:stretch>
+                  <a:fillRect/>
+                </a:stretch>
+              </a:blipFill>
+            </p:spPr>
+            <p:txBody>
+              <a:bodyPr/>
+              <a:lstStyle/>
+              <a:p>
+                <a:r>
+                  <a:rPr lang="en-US">
+                    <a:noFill/>
+                  </a:rPr>
+                  <a:t> </a:t>
+                </a:r>
+              </a:p>
+            </p:txBody>
+          </p:sp>
+        </mc:Fallback>
+      </mc:AlternateContent>
+      <p:sp>
+        <p:nvSpPr>
+          <p:cNvPr id="29" name="Left Brace 28">
+            <a:extLst>
+              <a:ext uri="{FF2B5EF4-FFF2-40B4-BE49-F238E27FC236}">
+                <a16:creationId xmlns:a16="http://schemas.microsoft.com/office/drawing/2014/main" id="{85EBE5CE-56A7-E2DB-3EB0-CAD904849329}"/>
+              </a:ext>
+            </a:extLst>
+          </p:cNvPr>
+          <p:cNvSpPr/>
+          <p:nvPr/>
+        </p:nvSpPr>
+        <p:spPr>
+          <a:xfrm>
+            <a:off x="2718112" y="3383461"/>
+            <a:ext cx="136050" cy="1134238"/>
+          </a:xfrm>
+          <a:prstGeom prst="leftBrace">
+            <a:avLst/>
+          </a:prstGeom>
+        </p:spPr>
+        <p:style>
+          <a:lnRef idx="1">
+            <a:schemeClr val="dk1"/>
+          </a:lnRef>
+          <a:fillRef idx="0">
+            <a:schemeClr val="dk1"/>
+          </a:fillRef>
+          <a:effectRef idx="0">
+            <a:schemeClr val="dk1"/>
+          </a:effectRef>
+          <a:fontRef idx="minor">
+            <a:schemeClr val="tx1"/>
+          </a:fontRef>
+        </p:style>
+        <p:txBody>
+          <a:bodyPr rtlCol="0" anchor="ctr"/>
+          <a:lstStyle/>
+          <a:p>
+            <a:pPr algn="ctr"/>
+            <a:endParaRPr lang="en-US" dirty="0"/>
+          </a:p>
+        </p:txBody>
+      </p:sp>
+      <p:sp>
+        <p:nvSpPr>
+          <p:cNvPr id="31" name="TextBox 30">
+            <a:extLst>
+              <a:ext uri="{FF2B5EF4-FFF2-40B4-BE49-F238E27FC236}">
+                <a16:creationId xmlns:a16="http://schemas.microsoft.com/office/drawing/2014/main" id="{B0B323DF-FB48-4BC6-AA36-D695CE0DA1D2}"/>
+              </a:ext>
+            </a:extLst>
+          </p:cNvPr>
+          <p:cNvSpPr txBox="1"/>
+          <p:nvPr/>
+        </p:nvSpPr>
+        <p:spPr>
+          <a:xfrm>
+            <a:off x="1537159" y="3627414"/>
+            <a:ext cx="864339" cy="646331"/>
+          </a:xfrm>
+          <a:prstGeom prst="rect">
+            <a:avLst/>
+          </a:prstGeom>
+          <a:noFill/>
+        </p:spPr>
+        <p:txBody>
+          <a:bodyPr wrap="none" rtlCol="0">
+            <a:spAutoFit/>
+          </a:bodyPr>
+          <a:lstStyle/>
+          <a:p>
+            <a:r>
+              <a:rPr lang="en-US" dirty="0">
+                <a:latin typeface="Times New Roman" panose="02020603050405020304" pitchFamily="18" charset="0"/>
+                <a:cs typeface="Times New Roman" panose="02020603050405020304" pitchFamily="18" charset="0"/>
+              </a:rPr>
+              <a:t>Known</a:t>
+            </a:r>
+          </a:p>
+          <a:p>
+            <a:r>
+              <a:rPr lang="en-US" dirty="0">
+                <a:latin typeface="Times New Roman" panose="02020603050405020304" pitchFamily="18" charset="0"/>
+                <a:cs typeface="Times New Roman" panose="02020603050405020304" pitchFamily="18" charset="0"/>
+              </a:rPr>
+              <a:t>inputs</a:t>
+            </a:r>
+          </a:p>
+        </p:txBody>
+      </p:sp>
+      <mc:AlternateContent xmlns:mc="http://schemas.openxmlformats.org/markup-compatibility/2006" xmlns:a14="http://schemas.microsoft.com/office/drawing/2010/main">
+        <mc:Choice Requires="a14">
+          <p:sp>
+            <p:nvSpPr>
+              <p:cNvPr id="32" name="TextBox 31">
+                <a:extLst>
+                  <a:ext uri="{FF2B5EF4-FFF2-40B4-BE49-F238E27FC236}">
+                    <a16:creationId xmlns:a16="http://schemas.microsoft.com/office/drawing/2014/main" id="{4287FAB1-007F-C7E9-D3F9-36F0BE83DC52}"/>
+                  </a:ext>
+                </a:extLst>
+              </p:cNvPr>
+              <p:cNvSpPr txBox="1"/>
+              <p:nvPr/>
+            </p:nvSpPr>
+            <p:spPr>
+              <a:xfrm>
+                <a:off x="2862400" y="3372161"/>
+                <a:ext cx="2148024" cy="291426"/>
+              </a:xfrm>
+              <a:prstGeom prst="rect">
+                <a:avLst/>
+              </a:prstGeom>
+              <a:noFill/>
+            </p:spPr>
+            <p:txBody>
+              <a:bodyPr wrap="none" lIns="0" tIns="0" rIns="0" bIns="0" rtlCol="0">
+                <a:spAutoFit/>
+              </a:bodyPr>
+              <a:lstStyle/>
+              <a:p>
+                <a:pPr/>
+                <a14:m>
+                  <m:oMathPara xmlns:m="http://schemas.openxmlformats.org/officeDocument/2006/math">
+                    <m:oMathParaPr>
+                      <m:jc m:val="centerGroup"/>
+                    </m:oMathParaPr>
+                    <m:oMath xmlns:m="http://schemas.openxmlformats.org/officeDocument/2006/math">
+                      <m:sSubSup>
+                        <m:sSubSupPr>
+                          <m:ctrlPr>
+                            <a:rPr lang="en-US" i="1" smtClean="0">
+                              <a:latin typeface="Cambria Math" panose="02040503050406030204" pitchFamily="18" charset="0"/>
+                            </a:rPr>
+                          </m:ctrlPr>
+                        </m:sSubSupPr>
+                        <m:e>
+                          <m:r>
+                            <a:rPr lang="en-US" b="0" i="1" smtClean="0">
+                              <a:latin typeface="Cambria Math" panose="02040503050406030204" pitchFamily="18" charset="0"/>
+                            </a:rPr>
+                            <m:t>𝑢</m:t>
+                          </m:r>
+                        </m:e>
+                        <m:sub>
+                          <m:r>
+                            <a:rPr lang="en-US" b="0" i="1" smtClean="0">
+                              <a:latin typeface="Cambria Math" panose="02040503050406030204" pitchFamily="18" charset="0"/>
+                            </a:rPr>
+                            <m:t>𝑖</m:t>
+                          </m:r>
+                          <m:r>
+                            <a:rPr lang="en-US" b="0" i="1" smtClean="0">
+                              <a:latin typeface="Cambria Math" panose="02040503050406030204" pitchFamily="18" charset="0"/>
+                            </a:rPr>
+                            <m:t>−</m:t>
+                          </m:r>
+                          <m:r>
+                            <a:rPr lang="en-US" b="0" i="1" smtClean="0">
+                              <a:latin typeface="Cambria Math" panose="02040503050406030204" pitchFamily="18" charset="0"/>
+                            </a:rPr>
+                            <m:t>𝑤</m:t>
+                          </m:r>
+                          <m:r>
+                            <a:rPr lang="en-US" b="0" i="1" smtClean="0">
+                              <a:latin typeface="Cambria Math" panose="02040503050406030204" pitchFamily="18" charset="0"/>
+                            </a:rPr>
+                            <m:t>+1</m:t>
+                          </m:r>
+                        </m:sub>
+                        <m:sup>
+                          <m:r>
+                            <a:rPr lang="en-US" b="0" i="1" smtClean="0">
+                              <a:latin typeface="Cambria Math" panose="02040503050406030204" pitchFamily="18" charset="0"/>
+                            </a:rPr>
+                            <m:t>1</m:t>
+                          </m:r>
+                        </m:sup>
+                      </m:sSubSup>
+                      <m:r>
+                        <a:rPr lang="en-US" b="0" i="1" smtClean="0">
+                          <a:latin typeface="Cambria Math" panose="02040503050406030204" pitchFamily="18" charset="0"/>
+                        </a:rPr>
+                        <m:t>,</m:t>
+                      </m:r>
+                      <m:sSubSup>
+                        <m:sSubSupPr>
+                          <m:ctrlPr>
+                            <a:rPr lang="en-US" i="1" smtClean="0">
+                              <a:latin typeface="Cambria Math" panose="02040503050406030204" pitchFamily="18" charset="0"/>
+                            </a:rPr>
+                          </m:ctrlPr>
+                        </m:sSubSupPr>
+                        <m:e>
+                          <m:r>
+                            <a:rPr lang="en-US" b="0" i="1" smtClean="0">
+                              <a:latin typeface="Cambria Math" panose="02040503050406030204" pitchFamily="18" charset="0"/>
+                            </a:rPr>
+                            <m:t>𝑢</m:t>
+                          </m:r>
+                        </m:e>
+                        <m:sub>
+                          <m:r>
+                            <a:rPr lang="en-US" b="0" i="1" smtClean="0">
+                              <a:latin typeface="Cambria Math" panose="02040503050406030204" pitchFamily="18" charset="0"/>
+                            </a:rPr>
+                            <m:t>𝑖</m:t>
+                          </m:r>
+                          <m:r>
+                            <a:rPr lang="en-US" b="0" i="1" smtClean="0">
+                              <a:latin typeface="Cambria Math" panose="02040503050406030204" pitchFamily="18" charset="0"/>
+                            </a:rPr>
+                            <m:t>−</m:t>
+                          </m:r>
+                          <m:r>
+                            <a:rPr lang="en-US" b="0" i="1" smtClean="0">
+                              <a:latin typeface="Cambria Math" panose="02040503050406030204" pitchFamily="18" charset="0"/>
+                            </a:rPr>
+                            <m:t>𝑤</m:t>
+                          </m:r>
+                          <m:r>
+                            <a:rPr lang="en-US" b="0" i="1" smtClean="0">
+                              <a:latin typeface="Cambria Math" panose="02040503050406030204" pitchFamily="18" charset="0"/>
+                            </a:rPr>
+                            <m:t>+2</m:t>
+                          </m:r>
+                        </m:sub>
+                        <m:sup>
+                          <m:r>
+                            <a:rPr lang="en-US" b="0" i="1" smtClean="0">
+                              <a:latin typeface="Cambria Math" panose="02040503050406030204" pitchFamily="18" charset="0"/>
+                            </a:rPr>
+                            <m:t>1</m:t>
+                          </m:r>
+                        </m:sup>
+                      </m:sSubSup>
+                      <m:r>
+                        <a:rPr lang="en-US" b="0" i="1" smtClean="0">
+                          <a:latin typeface="Cambria Math" panose="02040503050406030204" pitchFamily="18" charset="0"/>
+                        </a:rPr>
+                        <m:t>, …,</m:t>
+                      </m:r>
+                      <m:sSubSup>
+                        <m:sSubSupPr>
+                          <m:ctrlPr>
+                            <a:rPr lang="en-US" i="1" smtClean="0">
+                              <a:solidFill>
+                                <a:srgbClr val="2CA02C"/>
+                              </a:solidFill>
+                              <a:latin typeface="Cambria Math" panose="02040503050406030204" pitchFamily="18" charset="0"/>
+                            </a:rPr>
+                          </m:ctrlPr>
+                        </m:sSubSupPr>
+                        <m:e>
+                          <m:r>
+                            <a:rPr lang="en-US" b="0" i="1" smtClean="0">
+                              <a:solidFill>
+                                <a:srgbClr val="2CA02C"/>
+                              </a:solidFill>
+                              <a:latin typeface="Cambria Math" panose="02040503050406030204" pitchFamily="18" charset="0"/>
+                            </a:rPr>
+                            <m:t>𝑢</m:t>
+                          </m:r>
+                        </m:e>
+                        <m:sub>
+                          <m:r>
+                            <a:rPr lang="en-US" b="0" i="1" smtClean="0">
+                              <a:solidFill>
+                                <a:srgbClr val="2CA02C"/>
+                              </a:solidFill>
+                              <a:latin typeface="Cambria Math" panose="02040503050406030204" pitchFamily="18" charset="0"/>
+                            </a:rPr>
+                            <m:t>𝑖</m:t>
+                          </m:r>
+                        </m:sub>
+                        <m:sup>
+                          <m:r>
+                            <a:rPr lang="en-US" b="0" i="1" smtClean="0">
+                              <a:solidFill>
+                                <a:srgbClr val="2CA02C"/>
+                              </a:solidFill>
+                              <a:latin typeface="Cambria Math" panose="02040503050406030204" pitchFamily="18" charset="0"/>
+                            </a:rPr>
+                            <m:t>1</m:t>
+                          </m:r>
+                        </m:sup>
+                      </m:sSubSup>
+                    </m:oMath>
+                  </m:oMathPara>
+                </a14:m>
+                <a:endParaRPr lang="en-US" dirty="0"/>
+              </a:p>
+            </p:txBody>
+          </p:sp>
+        </mc:Choice>
+        <mc:Fallback xmlns="">
+          <p:sp>
+            <p:nvSpPr>
+              <p:cNvPr id="32" name="TextBox 31">
+                <a:extLst>
+                  <a:ext uri="{FF2B5EF4-FFF2-40B4-BE49-F238E27FC236}">
+                    <a16:creationId xmlns:a16="http://schemas.microsoft.com/office/drawing/2014/main" id="{4287FAB1-007F-C7E9-D3F9-36F0BE83DC52}"/>
+                  </a:ext>
+                </a:extLst>
+              </p:cNvPr>
+              <p:cNvSpPr txBox="1">
+                <a:spLocks noRot="1" noChangeAspect="1" noMove="1" noResize="1" noEditPoints="1" noAdjustHandles="1" noChangeArrowheads="1" noChangeShapeType="1" noTextEdit="1"/>
+              </p:cNvSpPr>
+              <p:nvPr/>
+            </p:nvSpPr>
+            <p:spPr>
+              <a:xfrm>
+                <a:off x="2862400" y="3372161"/>
+                <a:ext cx="2148024" cy="291426"/>
+              </a:xfrm>
+              <a:prstGeom prst="rect">
+                <a:avLst/>
+              </a:prstGeom>
+              <a:blipFill>
+                <a:blip r:embed="rId15"/>
+                <a:stretch>
+                  <a:fillRect l="-1176" r="-588" b="-16667"/>
+                </a:stretch>
+              </a:blipFill>
+            </p:spPr>
+            <p:txBody>
+              <a:bodyPr/>
+              <a:lstStyle/>
+              <a:p>
+                <a:r>
+                  <a:rPr lang="en-US">
+                    <a:noFill/>
+                  </a:rPr>
+                  <a:t> </a:t>
+                </a:r>
+              </a:p>
+            </p:txBody>
+          </p:sp>
+        </mc:Fallback>
+      </mc:AlternateContent>
+      <p:sp>
+        <p:nvSpPr>
+          <p:cNvPr id="33" name="TextBox 32">
+            <a:extLst>
+              <a:ext uri="{FF2B5EF4-FFF2-40B4-BE49-F238E27FC236}">
+                <a16:creationId xmlns:a16="http://schemas.microsoft.com/office/drawing/2014/main" id="{40E6D545-37E3-E038-BF23-BE0811FB144F}"/>
+              </a:ext>
+            </a:extLst>
+          </p:cNvPr>
+          <p:cNvSpPr txBox="1"/>
+          <p:nvPr/>
+        </p:nvSpPr>
+        <p:spPr>
+          <a:xfrm>
+            <a:off x="1537107" y="2386173"/>
+            <a:ext cx="1095172" cy="646331"/>
+          </a:xfrm>
+          <a:prstGeom prst="rect">
+            <a:avLst/>
+          </a:prstGeom>
+          <a:noFill/>
+        </p:spPr>
+        <p:txBody>
+          <a:bodyPr wrap="none" rtlCol="0">
+            <a:spAutoFit/>
+          </a:bodyPr>
+          <a:lstStyle/>
+          <a:p>
+            <a:r>
+              <a:rPr lang="en-US" dirty="0">
+                <a:latin typeface="Times New Roman" panose="02020603050405020304" pitchFamily="18" charset="0"/>
+                <a:cs typeface="Times New Roman" panose="02020603050405020304" pitchFamily="18" charset="0"/>
+              </a:rPr>
+              <a:t>Historical</a:t>
+            </a:r>
+          </a:p>
+          <a:p>
+            <a:r>
+              <a:rPr lang="en-US" dirty="0">
+                <a:latin typeface="Times New Roman" panose="02020603050405020304" pitchFamily="18" charset="0"/>
+                <a:cs typeface="Times New Roman" panose="02020603050405020304" pitchFamily="18" charset="0"/>
+              </a:rPr>
+              <a:t>inputs</a:t>
+            </a:r>
+          </a:p>
+        </p:txBody>
+      </p:sp>
+      <p:sp>
+        <p:nvSpPr>
+          <p:cNvPr id="34" name="Left Brace 33">
+            <a:extLst>
+              <a:ext uri="{FF2B5EF4-FFF2-40B4-BE49-F238E27FC236}">
+                <a16:creationId xmlns:a16="http://schemas.microsoft.com/office/drawing/2014/main" id="{A74774BB-5880-D7F3-E4D9-BF5995233CEF}"/>
+              </a:ext>
+            </a:extLst>
+          </p:cNvPr>
+          <p:cNvSpPr/>
+          <p:nvPr/>
+        </p:nvSpPr>
+        <p:spPr>
+          <a:xfrm>
+            <a:off x="1351882" y="2678895"/>
+            <a:ext cx="191619" cy="1299454"/>
+          </a:xfrm>
+          <a:prstGeom prst="leftBrace">
+            <a:avLst/>
+          </a:prstGeom>
+        </p:spPr>
+        <p:style>
+          <a:lnRef idx="1">
+            <a:schemeClr val="dk1"/>
+          </a:lnRef>
+          <a:fillRef idx="0">
+            <a:schemeClr val="dk1"/>
+          </a:fillRef>
+          <a:effectRef idx="0">
+            <a:schemeClr val="dk1"/>
+          </a:effectRef>
+          <a:fontRef idx="minor">
+            <a:schemeClr val="tx1"/>
+          </a:fontRef>
+        </p:style>
+        <p:txBody>
+          <a:bodyPr rtlCol="0" anchor="ctr"/>
+          <a:lstStyle/>
+          <a:p>
+            <a:pPr algn="ctr"/>
+            <a:endParaRPr lang="en-US" dirty="0"/>
+          </a:p>
+        </p:txBody>
+      </p:sp>
+      <p:sp>
+        <p:nvSpPr>
+          <p:cNvPr id="3" name="Right Brace 2">
+            <a:extLst>
+              <a:ext uri="{FF2B5EF4-FFF2-40B4-BE49-F238E27FC236}">
+                <a16:creationId xmlns:a16="http://schemas.microsoft.com/office/drawing/2014/main" id="{E2F152FE-373E-F194-FA8D-C28949BDA531}"/>
+              </a:ext>
+            </a:extLst>
+          </p:cNvPr>
+          <p:cNvSpPr/>
+          <p:nvPr/>
+        </p:nvSpPr>
+        <p:spPr>
+          <a:xfrm rot="16200000">
+            <a:off x="3866974" y="-38245"/>
+            <a:ext cx="138875" cy="2555643"/>
+          </a:xfrm>
+          <a:prstGeom prst="rightBrace">
+            <a:avLst/>
+          </a:prstGeom>
+        </p:spPr>
+        <p:style>
+          <a:lnRef idx="1">
+            <a:schemeClr val="dk1"/>
+          </a:lnRef>
+          <a:fillRef idx="0">
+            <a:schemeClr val="dk1"/>
+          </a:fillRef>
+          <a:effectRef idx="0">
+            <a:schemeClr val="dk1"/>
+          </a:effectRef>
+          <a:fontRef idx="minor">
+            <a:schemeClr val="tx1"/>
+          </a:fontRef>
+        </p:style>
+        <p:txBody>
+          <a:bodyPr rtlCol="0" anchor="ctr"/>
+          <a:lstStyle/>
+          <a:p>
+            <a:pPr algn="ctr"/>
+            <a:endParaRPr lang="en-US"/>
+          </a:p>
+        </p:txBody>
+      </p:sp>
+      <mc:AlternateContent xmlns:mc="http://schemas.openxmlformats.org/markup-compatibility/2006" xmlns:a14="http://schemas.microsoft.com/office/drawing/2010/main">
+        <mc:Choice Requires="a14">
+          <p:sp>
+            <p:nvSpPr>
+              <p:cNvPr id="6" name="TextBox 5">
+                <a:extLst>
+                  <a:ext uri="{FF2B5EF4-FFF2-40B4-BE49-F238E27FC236}">
+                    <a16:creationId xmlns:a16="http://schemas.microsoft.com/office/drawing/2014/main" id="{AEA4C201-50B9-DC65-3AE9-C53351188ADC}"/>
+                  </a:ext>
+                </a:extLst>
+              </p:cNvPr>
+              <p:cNvSpPr txBox="1"/>
+              <p:nvPr/>
+            </p:nvSpPr>
+            <p:spPr>
+              <a:xfrm>
+                <a:off x="3734753" y="806483"/>
+                <a:ext cx="455959" cy="369332"/>
+              </a:xfrm>
+              <a:prstGeom prst="rect">
+                <a:avLst/>
+              </a:prstGeom>
+              <a:noFill/>
+            </p:spPr>
+            <p:txBody>
+              <a:bodyPr wrap="none" rtlCol="0">
+                <a:spAutoFit/>
+              </a:bodyPr>
+              <a:lstStyle/>
+              <a:p>
+                <a:pPr/>
+                <a14:m>
+                  <m:oMathPara xmlns:m="http://schemas.openxmlformats.org/officeDocument/2006/math">
+                    <m:oMathParaPr>
+                      <m:jc m:val="centerGroup"/>
+                    </m:oMathParaPr>
+                    <m:oMath xmlns:m="http://schemas.openxmlformats.org/officeDocument/2006/math">
+                      <m:sSub>
+                        <m:sSubPr>
+                          <m:ctrlPr>
+                            <a:rPr lang="en-US" i="1" smtClean="0">
+                              <a:latin typeface="Cambria Math" panose="02040503050406030204" pitchFamily="18" charset="0"/>
+                              <a:cs typeface="Times New Roman" panose="02020603050405020304" pitchFamily="18" charset="0"/>
+                            </a:rPr>
+                          </m:ctrlPr>
+                        </m:sSubPr>
+                        <m:e>
+                          <m:r>
+                            <a:rPr lang="en-US" b="0" i="1" smtClean="0">
+                              <a:latin typeface="Cambria Math" panose="02040503050406030204" pitchFamily="18" charset="0"/>
+                              <a:cs typeface="Times New Roman" panose="02020603050405020304" pitchFamily="18" charset="0"/>
+                            </a:rPr>
+                            <m:t>𝑋</m:t>
+                          </m:r>
+                        </m:e>
+                        <m:sub>
+                          <m:r>
+                            <a:rPr lang="en-US" b="0" i="1" smtClean="0">
+                              <a:latin typeface="Cambria Math" panose="02040503050406030204" pitchFamily="18" charset="0"/>
+                              <a:cs typeface="Times New Roman" panose="02020603050405020304" pitchFamily="18" charset="0"/>
+                            </a:rPr>
+                            <m:t>𝑖</m:t>
+                          </m:r>
+                        </m:sub>
+                      </m:sSub>
+                    </m:oMath>
+                  </m:oMathPara>
+                </a14:m>
+                <a:endParaRPr lang="en-US" dirty="0">
+                  <a:latin typeface="Times New Roman" panose="02020603050405020304" pitchFamily="18" charset="0"/>
+                  <a:cs typeface="Times New Roman" panose="02020603050405020304" pitchFamily="18" charset="0"/>
+                </a:endParaRPr>
+              </a:p>
+            </p:txBody>
+          </p:sp>
+        </mc:Choice>
+        <mc:Fallback xmlns="">
+          <p:sp>
+            <p:nvSpPr>
+              <p:cNvPr id="6" name="TextBox 5">
+                <a:extLst>
+                  <a:ext uri="{FF2B5EF4-FFF2-40B4-BE49-F238E27FC236}">
+                    <a16:creationId xmlns:a16="http://schemas.microsoft.com/office/drawing/2014/main" id="{AEA4C201-50B9-DC65-3AE9-C53351188ADC}"/>
+                  </a:ext>
+                </a:extLst>
+              </p:cNvPr>
+              <p:cNvSpPr txBox="1">
+                <a:spLocks noRot="1" noChangeAspect="1" noMove="1" noResize="1" noEditPoints="1" noAdjustHandles="1" noChangeArrowheads="1" noChangeShapeType="1" noTextEdit="1"/>
+              </p:cNvSpPr>
+              <p:nvPr/>
+            </p:nvSpPr>
+            <p:spPr>
+              <a:xfrm>
+                <a:off x="3734753" y="806483"/>
+                <a:ext cx="455959" cy="369332"/>
+              </a:xfrm>
+              <a:prstGeom prst="rect">
+                <a:avLst/>
+              </a:prstGeom>
+              <a:blipFill>
+                <a:blip r:embed="rId16"/>
+                <a:stretch>
+                  <a:fillRect/>
+                </a:stretch>
+              </a:blipFill>
+            </p:spPr>
+            <p:txBody>
+              <a:bodyPr/>
+              <a:lstStyle/>
+              <a:p>
+                <a:r>
+                  <a:rPr lang="en-US">
+                    <a:noFill/>
+                  </a:rPr>
+                  <a:t> </a:t>
+                </a:r>
+              </a:p>
+            </p:txBody>
+          </p:sp>
+        </mc:Fallback>
+      </mc:AlternateContent>
+      <p:sp>
+        <p:nvSpPr>
+          <p:cNvPr id="10" name="Right Brace 9">
+            <a:extLst>
+              <a:ext uri="{FF2B5EF4-FFF2-40B4-BE49-F238E27FC236}">
+                <a16:creationId xmlns:a16="http://schemas.microsoft.com/office/drawing/2014/main" id="{E06BBE4F-9AAC-6916-743D-C718674C66FE}"/>
+              </a:ext>
+            </a:extLst>
+          </p:cNvPr>
+          <p:cNvSpPr/>
+          <p:nvPr/>
+        </p:nvSpPr>
+        <p:spPr>
+          <a:xfrm>
+            <a:off x="11420247" y="3031851"/>
+            <a:ext cx="153335" cy="504472"/>
+          </a:xfrm>
+          <a:prstGeom prst="rightBrace">
+            <a:avLst/>
+          </a:prstGeom>
+        </p:spPr>
+        <p:style>
+          <a:lnRef idx="1">
+            <a:schemeClr val="dk1"/>
+          </a:lnRef>
+          <a:fillRef idx="0">
+            <a:schemeClr val="dk1"/>
+          </a:fillRef>
+          <a:effectRef idx="0">
+            <a:schemeClr val="dk1"/>
+          </a:effectRef>
+          <a:fontRef idx="minor">
+            <a:schemeClr val="tx1"/>
+          </a:fontRef>
+        </p:style>
+        <p:txBody>
+          <a:bodyPr rtlCol="0" anchor="ctr"/>
+          <a:lstStyle/>
+          <a:p>
+            <a:pPr algn="ctr"/>
+            <a:endParaRPr lang="en-US"/>
+          </a:p>
+        </p:txBody>
+      </p:sp>
+      <mc:AlternateContent xmlns:mc="http://schemas.openxmlformats.org/markup-compatibility/2006">
+        <mc:Choice xmlns:a14="http://schemas.microsoft.com/office/drawing/2010/main" Requires="a14">
+          <p:sp>
+            <p:nvSpPr>
+              <p:cNvPr id="11" name="TextBox 10">
+                <a:extLst>
+                  <a:ext uri="{FF2B5EF4-FFF2-40B4-BE49-F238E27FC236}">
+                    <a16:creationId xmlns:a16="http://schemas.microsoft.com/office/drawing/2014/main" id="{A8D0FF62-7683-79BE-1686-065511DDD7EE}"/>
+                  </a:ext>
+                </a:extLst>
+              </p:cNvPr>
+              <p:cNvSpPr txBox="1"/>
+              <p:nvPr/>
+            </p:nvSpPr>
+            <p:spPr>
+              <a:xfrm>
+                <a:off x="11516164" y="3078432"/>
+                <a:ext cx="471347" cy="369588"/>
+              </a:xfrm>
+              <a:prstGeom prst="rect">
+                <a:avLst/>
+              </a:prstGeom>
+              <a:noFill/>
+            </p:spPr>
+            <p:txBody>
+              <a:bodyPr wrap="none" rtlCol="0">
+                <a:spAutoFit/>
+              </a:bodyPr>
+              <a:lstStyle/>
+              <a:p>
+                <a:pPr/>
+                <a14:m>
+                  <m:oMathPara xmlns:m="http://schemas.openxmlformats.org/officeDocument/2006/math">
+                    <m:oMathParaPr>
+                      <m:jc m:val="centerGroup"/>
+                    </m:oMathParaPr>
+                    <m:oMath xmlns:m="http://schemas.openxmlformats.org/officeDocument/2006/math">
+                      <m:sSubSup>
+                        <m:sSubSupPr>
+                          <m:ctrlPr>
+                            <a:rPr lang="en-US" i="1">
+                              <a:latin typeface="Cambria Math" panose="02040503050406030204" pitchFamily="18" charset="0"/>
+                              <a:cs typeface="Times New Roman" panose="02020603050405020304" pitchFamily="18" charset="0"/>
+                            </a:rPr>
+                          </m:ctrlPr>
+                        </m:sSubSupPr>
+                        <m:e>
+                          <m:r>
+                            <a:rPr lang="en-US" i="1">
+                              <a:latin typeface="Cambria Math" panose="02040503050406030204" pitchFamily="18" charset="0"/>
+                              <a:cs typeface="Times New Roman" panose="02020603050405020304" pitchFamily="18" charset="0"/>
+                            </a:rPr>
+                            <m:t>𝑋</m:t>
+                          </m:r>
+                        </m:e>
+                        <m:sub>
+                          <m:r>
+                            <a:rPr lang="en-US" i="1">
+                              <a:latin typeface="Cambria Math" panose="02040503050406030204" pitchFamily="18" charset="0"/>
+                              <a:cs typeface="Times New Roman" panose="02020603050405020304" pitchFamily="18" charset="0"/>
+                            </a:rPr>
+                            <m:t>𝑖</m:t>
+                          </m:r>
+                        </m:sub>
+                        <m:sup>
+                          <m:r>
+                            <a:rPr lang="en-US" i="1">
+                              <a:latin typeface="Cambria Math" panose="02040503050406030204" pitchFamily="18" charset="0"/>
+                              <a:cs typeface="Times New Roman" panose="02020603050405020304" pitchFamily="18" charset="0"/>
+                            </a:rPr>
+                            <m:t>′</m:t>
+                          </m:r>
+                        </m:sup>
+                      </m:sSubSup>
+                    </m:oMath>
+                  </m:oMathPara>
+                </a14:m>
+                <a:endParaRPr lang="en-US" dirty="0">
+                  <a:latin typeface="Times New Roman" panose="02020603050405020304" pitchFamily="18" charset="0"/>
+                  <a:cs typeface="Times New Roman" panose="02020603050405020304" pitchFamily="18" charset="0"/>
+                </a:endParaRPr>
+              </a:p>
+            </p:txBody>
+          </p:sp>
+        </mc:Choice>
+        <mc:Fallback>
+          <p:sp>
+            <p:nvSpPr>
+              <p:cNvPr id="11" name="TextBox 10">
+                <a:extLst>
+                  <a:ext uri="{FF2B5EF4-FFF2-40B4-BE49-F238E27FC236}">
+                    <a16:creationId xmlns:a16="http://schemas.microsoft.com/office/drawing/2014/main" id="{A8D0FF62-7683-79BE-1686-065511DDD7EE}"/>
+                  </a:ext>
+                </a:extLst>
+              </p:cNvPr>
+              <p:cNvSpPr txBox="1">
+                <a:spLocks noRot="1" noChangeAspect="1" noMove="1" noResize="1" noEditPoints="1" noAdjustHandles="1" noChangeArrowheads="1" noChangeShapeType="1" noTextEdit="1"/>
+              </p:cNvSpPr>
+              <p:nvPr/>
+            </p:nvSpPr>
+            <p:spPr>
+              <a:xfrm>
+                <a:off x="11516164" y="3078432"/>
+                <a:ext cx="471347" cy="369588"/>
+              </a:xfrm>
+              <a:prstGeom prst="rect">
+                <a:avLst/>
+              </a:prstGeom>
+              <a:blipFill>
+                <a:blip r:embed="rId17"/>
+                <a:stretch>
+                  <a:fillRect b="-3333"/>
+                </a:stretch>
+              </a:blipFill>
+            </p:spPr>
+            <p:txBody>
+              <a:bodyPr/>
+              <a:lstStyle/>
+              <a:p>
+                <a:r>
+                  <a:rPr lang="en-US">
+                    <a:noFill/>
+                  </a:rPr>
+                  <a:t> </a:t>
+                </a:r>
+              </a:p>
+            </p:txBody>
+          </p:sp>
+        </mc:Fallback>
+      </mc:AlternateContent>
+      <p:sp>
+        <p:nvSpPr>
+          <p:cNvPr id="17" name="Right Brace 16">
+            <a:extLst>
+              <a:ext uri="{FF2B5EF4-FFF2-40B4-BE49-F238E27FC236}">
+                <a16:creationId xmlns:a16="http://schemas.microsoft.com/office/drawing/2014/main" id="{EEAB54FB-9992-9ECF-BE61-43C3DAD68264}"/>
+              </a:ext>
+            </a:extLst>
+          </p:cNvPr>
+          <p:cNvSpPr/>
+          <p:nvPr/>
+        </p:nvSpPr>
+        <p:spPr>
+          <a:xfrm>
+            <a:off x="9401447" y="2200783"/>
+            <a:ext cx="153335" cy="504472"/>
+          </a:xfrm>
+          <a:prstGeom prst="rightBrace">
+            <a:avLst/>
+          </a:prstGeom>
+        </p:spPr>
+        <p:style>
+          <a:lnRef idx="1">
+            <a:schemeClr val="dk1"/>
+          </a:lnRef>
+          <a:fillRef idx="0">
+            <a:schemeClr val="dk1"/>
+          </a:fillRef>
+          <a:effectRef idx="0">
+            <a:schemeClr val="dk1"/>
+          </a:effectRef>
+          <a:fontRef idx="minor">
+            <a:schemeClr val="tx1"/>
+          </a:fontRef>
+        </p:style>
+        <p:txBody>
+          <a:bodyPr rtlCol="0" anchor="ctr"/>
+          <a:lstStyle/>
+          <a:p>
+            <a:pPr algn="ctr"/>
+            <a:endParaRPr lang="en-US"/>
+          </a:p>
+        </p:txBody>
+      </p:sp>
+      <mc:AlternateContent xmlns:mc="http://schemas.openxmlformats.org/markup-compatibility/2006" xmlns:a14="http://schemas.microsoft.com/office/drawing/2010/main">
+        <mc:Choice Requires="a14">
+          <p:sp>
+            <p:nvSpPr>
+              <p:cNvPr id="23" name="TextBox 22">
+                <a:extLst>
+                  <a:ext uri="{FF2B5EF4-FFF2-40B4-BE49-F238E27FC236}">
+                    <a16:creationId xmlns:a16="http://schemas.microsoft.com/office/drawing/2014/main" id="{35EF7DB5-2DF9-4933-4B5A-02A4F6461CE1}"/>
+                  </a:ext>
+                </a:extLst>
+              </p:cNvPr>
+              <p:cNvSpPr txBox="1"/>
+              <p:nvPr/>
+            </p:nvSpPr>
+            <p:spPr>
+              <a:xfrm>
+                <a:off x="9497364" y="2247364"/>
+                <a:ext cx="418576" cy="369332"/>
+              </a:xfrm>
+              <a:prstGeom prst="rect">
+                <a:avLst/>
+              </a:prstGeom>
+              <a:noFill/>
+            </p:spPr>
+            <p:txBody>
+              <a:bodyPr wrap="none" rtlCol="0">
+                <a:spAutoFit/>
+              </a:bodyPr>
+              <a:lstStyle/>
+              <a:p>
+                <a:pPr/>
+                <a14:m>
+                  <m:oMathPara xmlns:m="http://schemas.openxmlformats.org/officeDocument/2006/math">
+                    <m:oMathParaPr>
+                      <m:jc m:val="centerGroup"/>
+                    </m:oMathParaPr>
+                    <m:oMath xmlns:m="http://schemas.openxmlformats.org/officeDocument/2006/math">
+                      <m:sSub>
+                        <m:sSubPr>
+                          <m:ctrlPr>
+                            <a:rPr lang="en-US" i="1" smtClean="0">
+                              <a:latin typeface="Cambria Math" panose="02040503050406030204" pitchFamily="18" charset="0"/>
+                              <a:cs typeface="Times New Roman" panose="02020603050405020304" pitchFamily="18" charset="0"/>
+                            </a:rPr>
+                          </m:ctrlPr>
+                        </m:sSubPr>
+                        <m:e>
+                          <m:r>
+                            <a:rPr lang="en-US" b="0" i="1" smtClean="0">
+                              <a:latin typeface="Cambria Math" panose="02040503050406030204" pitchFamily="18" charset="0"/>
+                              <a:cs typeface="Times New Roman" panose="02020603050405020304" pitchFamily="18" charset="0"/>
+                            </a:rPr>
+                            <m:t>𝑌</m:t>
+                          </m:r>
+                        </m:e>
+                        <m:sub>
+                          <m:r>
+                            <a:rPr lang="en-US" b="0" i="1" smtClean="0">
+                              <a:latin typeface="Cambria Math" panose="02040503050406030204" pitchFamily="18" charset="0"/>
+                              <a:cs typeface="Times New Roman" panose="02020603050405020304" pitchFamily="18" charset="0"/>
+                            </a:rPr>
+                            <m:t>𝑖</m:t>
+                          </m:r>
+                        </m:sub>
+                      </m:sSub>
+                    </m:oMath>
+                  </m:oMathPara>
+                </a14:m>
+                <a:endParaRPr lang="en-US" dirty="0">
+                  <a:latin typeface="Times New Roman" panose="02020603050405020304" pitchFamily="18" charset="0"/>
+                  <a:cs typeface="Times New Roman" panose="02020603050405020304" pitchFamily="18" charset="0"/>
+                </a:endParaRPr>
+              </a:p>
+            </p:txBody>
+          </p:sp>
+        </mc:Choice>
+        <mc:Fallback xmlns="">
+          <p:sp>
+            <p:nvSpPr>
+              <p:cNvPr id="23" name="TextBox 22">
+                <a:extLst>
+                  <a:ext uri="{FF2B5EF4-FFF2-40B4-BE49-F238E27FC236}">
+                    <a16:creationId xmlns:a16="http://schemas.microsoft.com/office/drawing/2014/main" id="{35EF7DB5-2DF9-4933-4B5A-02A4F6461CE1}"/>
+                  </a:ext>
+                </a:extLst>
+              </p:cNvPr>
+              <p:cNvSpPr txBox="1">
+                <a:spLocks noRot="1" noChangeAspect="1" noMove="1" noResize="1" noEditPoints="1" noAdjustHandles="1" noChangeArrowheads="1" noChangeShapeType="1" noTextEdit="1"/>
+              </p:cNvSpPr>
+              <p:nvPr/>
+            </p:nvSpPr>
+            <p:spPr>
+              <a:xfrm>
+                <a:off x="9497364" y="2247364"/>
+                <a:ext cx="418576" cy="369332"/>
+              </a:xfrm>
+              <a:prstGeom prst="rect">
+                <a:avLst/>
+              </a:prstGeom>
+              <a:blipFill>
+                <a:blip r:embed="rId18"/>
+                <a:stretch>
+                  <a:fillRect/>
                 </a:stretch>
               </a:blipFill>
             </p:spPr>
